--- a/presentations/b04-access/B04_Access_Narrated.pptx
+++ b/presentations/b04-access/B04_Access_Narrated.pptx
@@ -116,25 +116,25 @@
   <p:extLst>
     <p:ext uri="{521415D9-36F7-43E2-AB2F-B90AF26B5E84}">
       <p14:sectionLst xmlns:p14="http://schemas.microsoft.com/office/powerpoint/2010/main">
-        <p14:section name="Why policy decides" id="{E00F64D1-D7C8-9315-6EE6-551363C2343E}">
+        <p14:section name="Why policy decides" id="{2D51345D-0F8E-8DB9-0186-8CE07524DE10}">
           <p14:sldIdLst>
             <p14:sldId id="256"/>
             <p14:sldId id="257"/>
             <p14:sldId id="258"/>
           </p14:sldIdLst>
         </p14:section>
-        <p14:section name="What it is" id="{BAC907E6-FBB3-7BAB-A933-FE99288F0151}">
+        <p14:section name="What it is" id="{1BE0F904-7F9A-51DF-05E0-ADD93FA25F91}">
           <p14:sldIdLst>
             <p14:sldId id="259"/>
             <p14:sldId id="260"/>
           </p14:sldIdLst>
         </p14:section>
-        <p14:section name="Who decides" id="{23DA4FC4-32CA-5649-87A0-61922AD2029B}">
+        <p14:section name="Who decides" id="{01629FB5-DFAC-9508-6B4E-2245B5CBB159}">
           <p14:sldIdLst>
             <p14:sldId id="261"/>
           </p14:sldIdLst>
         </p14:section>
-        <p14:section name="How to run it" id="{D657910E-00D7-8F5E-3B53-2B2C0068C18D}">
+        <p14:section name="How to run it" id="{E702B2E6-35E7-3AB4-C13C-8A6151D3D66A}">
           <p14:sldIdLst>
             <p14:sldId id="262"/>
             <p14:sldId id="263"/>
@@ -142,7 +142,7 @@
             <p14:sldId id="265"/>
           </p14:sldIdLst>
         </p14:section>
-        <p14:section name="Backup" id="{85737FF1-5AD3-1FF2-01C3-D3865C0A88D8}">
+        <p14:section name="Backup" id="{F733CEE1-43F3-77DA-4777-84D46E206AE9}">
           <p14:sldIdLst/>
         </p14:section>
       </p14:sectionLst>
@@ -179,7 +179,7 @@
     </p:spTree>
     <p:extLst>
       <p:ext uri="{BB962C8B-B14F-4D97-AF65-F5344CB8AC3E}">
-        <p14:creationId xmlns:p14="http://schemas.microsoft.com/office/powerpoint/2010/main" val="1286048662"/>
+        <p14:creationId xmlns:p14="http://schemas.microsoft.com/office/powerpoint/2010/main" val="3304339711"/>
       </p:ext>
     </p:extLst>
   </p:cSld>
@@ -325,7 +325,7 @@
           <a:p>
             <a:r>
               <a:rPr lang="en-US" dirty="0"/>
-              <a:t>[0:00–0:34]  This briefing comes from Book 04 of the Modernization Workbook, Access and Privilege.
+              <a:t>[0:00–0:34]  This briefing comes from Book 04 of the Federal Modernization Workbook, Access and Privilege.
 Book 02 moved the identity. Book 03 made its facts trustworthy. This book is about what happens with them on every sign-in: who gets access to what, under which conditions, and how administrator power is kept from becoming an open door.
 I'll take it through why, what, who and how. The short version: in Zero Trust, every access decision is a policy decision, and the policy library is the agency's access control in practice.
 Workbook: Book 04, index.</a:t>
@@ -1452,7 +1452,7 @@
                   <a:schemeClr val="accent5"/>
                 </a:solidFill>
               </a:rPr>
-              <a:t>Modernization Workbook  ·  Book 04 Access &amp; Privilege</a:t>
+              <a:t>Federal Modernization Workbook  ·  Book 04 Access &amp; Privilege</a:t>
             </a:r>
             <a:endParaRPr lang="en-US" sz="1000" dirty="0"/>
           </a:p>
@@ -1942,7 +1942,87 @@
       </p:sp>
       <p:sp>
         <p:nvSpPr>
-          <p:cNvPr id="4" name="Agenda line"/>
+          <p:cNvPr id="4" name="Presenter"/>
+          <p:cNvSpPr txBox="1"/>
+          <p:nvPr/>
+        </p:nvSpPr>
+        <p:spPr>
+          <a:xfrm>
+            <a:off x="731520" y="5897880"/>
+            <a:ext cx="6858000" cy="365760"/>
+          </a:xfrm>
+          <a:prstGeom prst="rect">
+            <a:avLst/>
+          </a:prstGeom>
+          <a:noFill/>
+          <a:ln/>
+        </p:spPr>
+        <p:txBody>
+          <a:bodyPr wrap="square" lIns="0" tIns="0" rIns="0" bIns="0" rtlCol="0" anchor="ctr"/>
+          <a:lstStyle/>
+          <a:p>
+            <a:pPr marL="0" indent="0">
+              <a:buNone/>
+            </a:pPr>
+            <a:r>
+              <a:rPr lang="en-US" sz="1600" dirty="0">
+                <a:solidFill>
+                  <a:srgbClr val="64748B"/>
+                </a:solidFill>
+              </a:rPr>
+              <a:t>Presented by  </a:t>
+            </a:r>
+            <a:r>
+              <a:rPr lang="en-US" sz="1600" b="1" dirty="0">
+                <a:solidFill>
+                  <a:srgbClr val="1F2A44"/>
+                </a:solidFill>
+              </a:rPr>
+              <a:t>Michael F. Stratton</a:t>
+            </a:r>
+            <a:endParaRPr lang="en-US" sz="1600" dirty="0"/>
+          </a:p>
+        </p:txBody>
+      </p:sp>
+      <p:sp>
+        <p:nvSpPr>
+          <p:cNvPr id="5" name="Disclaimer"/>
+          <p:cNvSpPr txBox="1"/>
+          <p:nvPr/>
+        </p:nvSpPr>
+        <p:spPr>
+          <a:xfrm>
+            <a:off x="731520" y="6309360"/>
+            <a:ext cx="8686800" cy="274320"/>
+          </a:xfrm>
+          <a:prstGeom prst="rect">
+            <a:avLst/>
+          </a:prstGeom>
+          <a:noFill/>
+          <a:ln/>
+        </p:spPr>
+        <p:txBody>
+          <a:bodyPr wrap="square" lIns="0" tIns="0" rIns="0" bIns="0" rtlCol="0" anchor="ctr"/>
+          <a:lstStyle/>
+          <a:p>
+            <a:pPr marL="0" indent="0">
+              <a:buNone/>
+            </a:pPr>
+            <a:r>
+              <a:rPr lang="en-US" sz="1050" dirty="0">
+                <a:solidFill>
+                  <a:srgbClr val="64748B"/>
+                </a:solidFill>
+              </a:rPr>
+              <a:t>Not an official U.S. government publication. Independent technical analysis; not reviewed or endorsed by any federal agency.</a:t>
+            </a:r>
+            <a:endParaRPr lang="en-US" sz="1050" dirty="0"/>
+          </a:p>
+        </p:txBody>
+      </p:sp>
+      <p:sp>
+        <p:nvSpPr>
+          <p:cNvPr id="6" name="Agenda line"/>
           <p:cNvSpPr txBox="1"/>
           <p:nvPr/>
         </p:nvSpPr>
@@ -2026,7 +2106,7 @@
       </p:sp>
       <p:sp>
         <p:nvSpPr>
-          <p:cNvPr id="5" name="Series line"/>
+          <p:cNvPr id="7" name="Series line"/>
           <p:cNvSpPr txBox="1"/>
           <p:nvPr/>
         </p:nvSpPr>
@@ -2054,7 +2134,7 @@
                   <a:srgbClr val="1F2A44"/>
                 </a:solidFill>
               </a:rPr>
-              <a:t>Modernization Workbook</a:t>
+              <a:t>Federal Modernization Workbook</a:t>
             </a:r>
             <a:endParaRPr lang="en-US" sz="1600" dirty="0"/>
           </a:p>
@@ -2076,11 +2156,11 @@
       </p:sp>
       <p:pic>
         <p:nvPicPr>
-          <p:cNvPr id="6" name="Narration">
+          <p:cNvPr id="8" name="Narration" descr="Narration for this slide; captions available">
             <a:hlinkClick r:id="" action="ppaction://media"/>
             <a:extLst>
               <a:ext uri="{FF2B5EF4-FFF2-40B4-BE49-F238E27FC236}">
-                <a16:creationId xmlns:a16="http://schemas.microsoft.com/office/drawing/2014/main" id="{70770C27-5DC9-AF0B-5633-9479B11DA0CE}"/>
+                <a16:creationId xmlns:a16="http://schemas.microsoft.com/office/drawing/2014/main" id="{15BC8509-896A-60F2-877D-A21D26AAF489}"/>
               </a:ext>
             </a:extLst>
           </p:cNvPr>
@@ -2091,7 +2171,17 @@
             <a:audioFile r:link="rId2"/>
             <p:extLst>
               <p:ext uri="{DAA4B4D4-6D71-4841-9C94-3DE7FCFB9230}">
-                <p14:media xmlns:p14="http://schemas.microsoft.com/office/powerpoint/2010/main" r:embed="rId1"/>
+                <p14:media xmlns:p14="http://schemas.microsoft.com/office/powerpoint/2010/main" r:embed="rId1">
+                  <p14:extLst>
+                    <p:ext uri="{3AFAAA56-56D3-431D-BCD4-E75A35582382}">
+                      <p173:tracksInfo xmlns:p173="http://schemas.microsoft.com/office/powerpoint/2017/3/main" displayLoc="slide">
+                        <p173:trackLst>
+                          <p173:track id="{67C9D76B-B9E1-42B0-A0E1-84F4D36DAB4B}" label="English (captions)" lang="en-US" r:embed="rId6"/>
+                        </p173:trackLst>
+                      </p173:tracksInfo>
+                    </p:ext>
+                  </p14:extLst>
+                </p14:media>
               </p:ext>
             </p:extLst>
           </p:nvPr>
@@ -2119,10 +2209,10 @@
   </p:clrMapOvr>
   <mc:AlternateContent xmlns:mc="http://schemas.openxmlformats.org/markup-compatibility/2006">
     <mc:Choice xmlns:p14="http://schemas.microsoft.com/office/powerpoint/2010/main" Requires="p14">
-      <p:transition spd="slow" p14:dur="2000" advTm="35080"/>
+      <p:transition spd="slow" p14:dur="2000" advTm="35320"/>
     </mc:Choice>
     <mc:Fallback>
-      <p:transition spd="slow" advTm="35080"/>
+      <p:transition spd="slow" advTm="35320"/>
     </mc:Fallback>
   </mc:AlternateContent>
   <p:timing>
@@ -2156,9 +2246,9 @@
                                   <p:childTnLst>
                                     <p:cmd type="call" cmd="playFrom(0.0)">
                                       <p:cBhvr>
-                                        <p:cTn id="6" dur="34080" fill="hold"/>
+                                        <p:cTn id="6" dur="34320" fill="hold"/>
                                         <p:tgtEl>
-                                          <p:spTgt spid="6"/>
+                                          <p:spTgt spid="8"/>
                                         </p:tgtEl>
                                       </p:cBhvr>
                                     </p:cmd>
@@ -2258,7 +2348,13 @@
       </p:sp>
       <p:sp>
         <p:nvSpPr>
-          <p:cNvPr id="3" name="Tag How"/>
+          <p:cNvPr id="3" name="Tag How">
+            <a:extLst>
+              <a:ext uri="{C183D7F6-B498-43B3-948B-1728B52AA6E4}">
+                <adec:decorative xmlns:adec="http://schemas.microsoft.com/office/drawing/2017/decorative" val="1"/>
+              </a:ext>
+            </a:extLst>
+          </p:cNvPr>
           <p:cNvSpPr/>
           <p:nvPr/>
         </p:nvSpPr>
@@ -2321,7 +2417,13 @@
       </p:sp>
       <p:sp>
         <p:nvSpPr>
-          <p:cNvPr id="5" name="Ask 1"/>
+          <p:cNvPr id="5" name="Ask 1">
+            <a:extLst>
+              <a:ext uri="{C183D7F6-B498-43B3-948B-1728B52AA6E4}">
+                <adec:decorative xmlns:adec="http://schemas.microsoft.com/office/drawing/2017/decorative" val="1"/>
+              </a:ext>
+            </a:extLst>
+          </p:cNvPr>
           <p:cNvSpPr/>
           <p:nvPr/>
         </p:nvSpPr>
@@ -2355,7 +2457,13 @@
       </p:sp>
       <p:sp>
         <p:nvSpPr>
-          <p:cNvPr id="6" name="Icon FaListCheck"/>
+          <p:cNvPr id="6" name="Icon FaListCheck">
+            <a:extLst>
+              <a:ext uri="{C183D7F6-B498-43B3-948B-1728B52AA6E4}">
+                <adec:decorative xmlns:adec="http://schemas.microsoft.com/office/drawing/2017/decorative" val="1"/>
+              </a:ext>
+            </a:extLst>
+          </p:cNvPr>
           <p:cNvSpPr/>
           <p:nvPr/>
         </p:nvSpPr>
@@ -2380,7 +2488,13 @@
       </p:sp>
       <p:pic>
         <p:nvPicPr>
-          <p:cNvPr id="7" name="Image 0" descr="C:\Users\whale\git\mwb-b04\presentations\_build\icons\FaListCheck.png"/>
+          <p:cNvPr id="7" name="Image 0">
+            <a:extLst>
+              <a:ext uri="{C183D7F6-B498-43B3-948B-1728B52AA6E4}">
+                <adec:decorative xmlns:adec="http://schemas.microsoft.com/office/drawing/2017/decorative" val="1"/>
+              </a:ext>
+            </a:extLst>
+          </p:cNvPr>
           <p:cNvPicPr>
             <a:picLocks noChangeAspect="1"/>
           </p:cNvPicPr>
@@ -2457,7 +2571,13 @@
       </p:sp>
       <p:sp>
         <p:nvSpPr>
-          <p:cNvPr id="9" name="Ask 2"/>
+          <p:cNvPr id="9" name="Ask 2">
+            <a:extLst>
+              <a:ext uri="{C183D7F6-B498-43B3-948B-1728B52AA6E4}">
+                <adec:decorative xmlns:adec="http://schemas.microsoft.com/office/drawing/2017/decorative" val="1"/>
+              </a:ext>
+            </a:extLst>
+          </p:cNvPr>
           <p:cNvSpPr/>
           <p:nvPr/>
         </p:nvSpPr>
@@ -2491,7 +2611,13 @@
       </p:sp>
       <p:sp>
         <p:nvSpPr>
-          <p:cNvPr id="10" name="Icon FaUserClock"/>
+          <p:cNvPr id="10" name="Icon FaUserClock">
+            <a:extLst>
+              <a:ext uri="{C183D7F6-B498-43B3-948B-1728B52AA6E4}">
+                <adec:decorative xmlns:adec="http://schemas.microsoft.com/office/drawing/2017/decorative" val="1"/>
+              </a:ext>
+            </a:extLst>
+          </p:cNvPr>
           <p:cNvSpPr/>
           <p:nvPr/>
         </p:nvSpPr>
@@ -2516,7 +2642,13 @@
       </p:sp>
       <p:pic>
         <p:nvPicPr>
-          <p:cNvPr id="11" name="Image 1" descr="C:\Users\whale\git\mwb-b04\presentations\_build\icons\FaUserClock.png"/>
+          <p:cNvPr id="11" name="Image 1">
+            <a:extLst>
+              <a:ext uri="{C183D7F6-B498-43B3-948B-1728B52AA6E4}">
+                <adec:decorative xmlns:adec="http://schemas.microsoft.com/office/drawing/2017/decorative" val="1"/>
+              </a:ext>
+            </a:extLst>
+          </p:cNvPr>
           <p:cNvPicPr>
             <a:picLocks noChangeAspect="1"/>
           </p:cNvPicPr>
@@ -2593,7 +2725,13 @@
       </p:sp>
       <p:sp>
         <p:nvSpPr>
-          <p:cNvPr id="13" name="Ask 3"/>
+          <p:cNvPr id="13" name="Ask 3">
+            <a:extLst>
+              <a:ext uri="{C183D7F6-B498-43B3-948B-1728B52AA6E4}">
+                <adec:decorative xmlns:adec="http://schemas.microsoft.com/office/drawing/2017/decorative" val="1"/>
+              </a:ext>
+            </a:extLst>
+          </p:cNvPr>
           <p:cNvSpPr/>
           <p:nvPr/>
         </p:nvSpPr>
@@ -2627,7 +2765,13 @@
       </p:sp>
       <p:sp>
         <p:nvSpPr>
-          <p:cNvPr id="14" name="Icon FaPeopleArrows"/>
+          <p:cNvPr id="14" name="Icon FaPeopleArrows">
+            <a:extLst>
+              <a:ext uri="{C183D7F6-B498-43B3-948B-1728B52AA6E4}">
+                <adec:decorative xmlns:adec="http://schemas.microsoft.com/office/drawing/2017/decorative" val="1"/>
+              </a:ext>
+            </a:extLst>
+          </p:cNvPr>
           <p:cNvSpPr/>
           <p:nvPr/>
         </p:nvSpPr>
@@ -2652,7 +2796,13 @@
       </p:sp>
       <p:pic>
         <p:nvPicPr>
-          <p:cNvPr id="15" name="Image 2" descr="C:\Users\whale\git\mwb-b04\presentations\_build\icons\FaPeopleArrows.png"/>
+          <p:cNvPr id="15" name="Image 2">
+            <a:extLst>
+              <a:ext uri="{C183D7F6-B498-43B3-948B-1728B52AA6E4}">
+                <adec:decorative xmlns:adec="http://schemas.microsoft.com/office/drawing/2017/decorative" val="1"/>
+              </a:ext>
+            </a:extLst>
+          </p:cNvPr>
           <p:cNvPicPr>
             <a:picLocks noChangeAspect="1"/>
           </p:cNvPicPr>
@@ -2729,7 +2879,13 @@
       </p:sp>
       <p:sp>
         <p:nvSpPr>
-          <p:cNvPr id="17" name="Ask 4"/>
+          <p:cNvPr id="17" name="Ask 4">
+            <a:extLst>
+              <a:ext uri="{C183D7F6-B498-43B3-948B-1728B52AA6E4}">
+                <adec:decorative xmlns:adec="http://schemas.microsoft.com/office/drawing/2017/decorative" val="1"/>
+              </a:ext>
+            </a:extLst>
+          </p:cNvPr>
           <p:cNvSpPr/>
           <p:nvPr/>
         </p:nvSpPr>
@@ -2763,7 +2919,13 @@
       </p:sp>
       <p:sp>
         <p:nvSpPr>
-          <p:cNvPr id="18" name="Icon FaCodeBranch"/>
+          <p:cNvPr id="18" name="Icon FaCodeBranch">
+            <a:extLst>
+              <a:ext uri="{C183D7F6-B498-43B3-948B-1728B52AA6E4}">
+                <adec:decorative xmlns:adec="http://schemas.microsoft.com/office/drawing/2017/decorative" val="1"/>
+              </a:ext>
+            </a:extLst>
+          </p:cNvPr>
           <p:cNvSpPr/>
           <p:nvPr/>
         </p:nvSpPr>
@@ -2788,7 +2950,13 @@
       </p:sp>
       <p:pic>
         <p:nvPicPr>
-          <p:cNvPr id="19" name="Image 3" descr="C:\Users\whale\git\mwb-b04\presentations\_build\icons\FaCodeBranch.png"/>
+          <p:cNvPr id="19" name="Image 3">
+            <a:extLst>
+              <a:ext uri="{C183D7F6-B498-43B3-948B-1728B52AA6E4}">
+                <adec:decorative xmlns:adec="http://schemas.microsoft.com/office/drawing/2017/decorative" val="1"/>
+              </a:ext>
+            </a:extLst>
+          </p:cNvPr>
           <p:cNvPicPr>
             <a:picLocks noChangeAspect="1"/>
           </p:cNvPicPr>
@@ -2865,7 +3033,13 @@
       </p:sp>
       <p:sp>
         <p:nvSpPr>
-          <p:cNvPr id="21" name="Next"/>
+          <p:cNvPr id="21" name="Next">
+            <a:extLst>
+              <a:ext uri="{C183D7F6-B498-43B3-948B-1728B52AA6E4}">
+                <adec:decorative xmlns:adec="http://schemas.microsoft.com/office/drawing/2017/decorative" val="1"/>
+              </a:ext>
+            </a:extLst>
+          </p:cNvPr>
           <p:cNvSpPr/>
           <p:nvPr/>
         </p:nvSpPr>
@@ -2899,7 +3073,13 @@
       </p:sp>
       <p:sp>
         <p:nvSpPr>
-          <p:cNvPr id="22" name="Icon FaBook"/>
+          <p:cNvPr id="22" name="Icon FaBook">
+            <a:extLst>
+              <a:ext uri="{C183D7F6-B498-43B3-948B-1728B52AA6E4}">
+                <adec:decorative xmlns:adec="http://schemas.microsoft.com/office/drawing/2017/decorative" val="1"/>
+              </a:ext>
+            </a:extLst>
+          </p:cNvPr>
           <p:cNvSpPr/>
           <p:nvPr/>
         </p:nvSpPr>
@@ -2924,7 +3104,13 @@
       </p:sp>
       <p:pic>
         <p:nvPicPr>
-          <p:cNvPr id="23" name="Image 4" descr="C:\Users\whale\git\mwb-b04\presentations\_build\icons\FaBook.png"/>
+          <p:cNvPr id="23" name="Image 4">
+            <a:extLst>
+              <a:ext uri="{C183D7F6-B498-43B3-948B-1728B52AA6E4}">
+                <adec:decorative xmlns:adec="http://schemas.microsoft.com/office/drawing/2017/decorative" val="1"/>
+              </a:ext>
+            </a:extLst>
+          </p:cNvPr>
           <p:cNvPicPr>
             <a:picLocks noChangeAspect="1"/>
           </p:cNvPicPr>
@@ -3037,11 +3223,11 @@
       </p:sp>
       <p:pic>
         <p:nvPicPr>
-          <p:cNvPr id="26" name="Narration">
+          <p:cNvPr id="26" name="Narration" descr="Narration for this slide; captions available">
             <a:hlinkClick r:id="" action="ppaction://media"/>
             <a:extLst>
               <a:ext uri="{FF2B5EF4-FFF2-40B4-BE49-F238E27FC236}">
-                <a16:creationId xmlns:a16="http://schemas.microsoft.com/office/drawing/2014/main" id="{2E8A8EC8-AC27-3867-08C0-C61BA1E5F4D1}"/>
+                <a16:creationId xmlns:a16="http://schemas.microsoft.com/office/drawing/2014/main" id="{2F2653B4-653F-96E9-674C-1611C418BEC4}"/>
               </a:ext>
             </a:extLst>
           </p:cNvPr>
@@ -3052,7 +3238,17 @@
             <a:audioFile r:link="rId2"/>
             <p:extLst>
               <p:ext uri="{DAA4B4D4-6D71-4841-9C94-3DE7FCFB9230}">
-                <p14:media xmlns:p14="http://schemas.microsoft.com/office/powerpoint/2010/main" r:embed="rId1"/>
+                <p14:media xmlns:p14="http://schemas.microsoft.com/office/powerpoint/2010/main" r:embed="rId1">
+                  <p14:extLst>
+                    <p:ext uri="{3AFAAA56-56D3-431D-BCD4-E75A35582382}">
+                      <p173:tracksInfo xmlns:p173="http://schemas.microsoft.com/office/powerpoint/2017/3/main" displayLoc="slide">
+                        <p173:trackLst>
+                          <p173:track id="{EC120358-AE27-4679-BDF8-9C951146005B}" label="English (captions)" lang="en-US" r:embed="rId11"/>
+                        </p173:trackLst>
+                      </p173:tracksInfo>
+                    </p:ext>
+                  </p14:extLst>
+                </p14:media>
               </p:ext>
             </p:extLst>
           </p:nvPr>
@@ -3219,7 +3415,13 @@
       </p:sp>
       <p:sp>
         <p:nvSpPr>
-          <p:cNvPr id="3" name="Tag Why"/>
+          <p:cNvPr id="3" name="Tag Why">
+            <a:extLst>
+              <a:ext uri="{C183D7F6-B498-43B3-948B-1728B52AA6E4}">
+                <adec:decorative xmlns:adec="http://schemas.microsoft.com/office/drawing/2017/decorative" val="1"/>
+              </a:ext>
+            </a:extLst>
+          </p:cNvPr>
           <p:cNvSpPr/>
           <p:nvPr/>
         </p:nvSpPr>
@@ -3282,7 +3484,13 @@
       </p:sp>
       <p:sp>
         <p:nvSpPr>
-          <p:cNvPr id="5" name="Icon FaLandmark"/>
+          <p:cNvPr id="5" name="Icon FaLandmark">
+            <a:extLst>
+              <a:ext uri="{C183D7F6-B498-43B3-948B-1728B52AA6E4}">
+                <adec:decorative xmlns:adec="http://schemas.microsoft.com/office/drawing/2017/decorative" val="1"/>
+              </a:ext>
+            </a:extLst>
+          </p:cNvPr>
           <p:cNvSpPr/>
           <p:nvPr/>
         </p:nvSpPr>
@@ -3307,7 +3515,13 @@
       </p:sp>
       <p:pic>
         <p:nvPicPr>
-          <p:cNvPr id="6" name="Image 0" descr="C:\Users\whale\git\mwb-b04\presentations\_build\icons\FaLandmark.png"/>
+          <p:cNvPr id="6" name="Image 0">
+            <a:extLst>
+              <a:ext uri="{C183D7F6-B498-43B3-948B-1728B52AA6E4}">
+                <adec:decorative xmlns:adec="http://schemas.microsoft.com/office/drawing/2017/decorative" val="1"/>
+              </a:ext>
+            </a:extLst>
+          </p:cNvPr>
           <p:cNvPicPr>
             <a:picLocks noChangeAspect="1"/>
           </p:cNvPicPr>
@@ -3381,7 +3595,13 @@
       </p:sp>
       <p:sp>
         <p:nvSpPr>
-          <p:cNvPr id="8" name="Icon FaBook"/>
+          <p:cNvPr id="8" name="Icon FaBook">
+            <a:extLst>
+              <a:ext uri="{C183D7F6-B498-43B3-948B-1728B52AA6E4}">
+                <adec:decorative xmlns:adec="http://schemas.microsoft.com/office/drawing/2017/decorative" val="1"/>
+              </a:ext>
+            </a:extLst>
+          </p:cNvPr>
           <p:cNvSpPr/>
           <p:nvPr/>
         </p:nvSpPr>
@@ -3406,7 +3626,13 @@
       </p:sp>
       <p:pic>
         <p:nvPicPr>
-          <p:cNvPr id="9" name="Image 1" descr="C:\Users\whale\git\mwb-b04\presentations\_build\icons\FaBook.png"/>
+          <p:cNvPr id="9" name="Image 1">
+            <a:extLst>
+              <a:ext uri="{C183D7F6-B498-43B3-948B-1728B52AA6E4}">
+                <adec:decorative xmlns:adec="http://schemas.microsoft.com/office/drawing/2017/decorative" val="1"/>
+              </a:ext>
+            </a:extLst>
+          </p:cNvPr>
           <p:cNvPicPr>
             <a:picLocks noChangeAspect="1"/>
           </p:cNvPicPr>
@@ -3480,7 +3706,13 @@
       </p:sp>
       <p:sp>
         <p:nvSpPr>
-          <p:cNvPr id="11" name="Icon FaScaleBalanced"/>
+          <p:cNvPr id="11" name="Icon FaScaleBalanced">
+            <a:extLst>
+              <a:ext uri="{C183D7F6-B498-43B3-948B-1728B52AA6E4}">
+                <adec:decorative xmlns:adec="http://schemas.microsoft.com/office/drawing/2017/decorative" val="1"/>
+              </a:ext>
+            </a:extLst>
+          </p:cNvPr>
           <p:cNvSpPr/>
           <p:nvPr/>
         </p:nvSpPr>
@@ -3505,7 +3737,13 @@
       </p:sp>
       <p:pic>
         <p:nvPicPr>
-          <p:cNvPr id="12" name="Image 2" descr="C:\Users\whale\git\mwb-b04\presentations\_build\icons\FaScaleBalanced.png"/>
+          <p:cNvPr id="12" name="Image 2">
+            <a:extLst>
+              <a:ext uri="{C183D7F6-B498-43B3-948B-1728B52AA6E4}">
+                <adec:decorative xmlns:adec="http://schemas.microsoft.com/office/drawing/2017/decorative" val="1"/>
+              </a:ext>
+            </a:extLst>
+          </p:cNvPr>
           <p:cNvPicPr>
             <a:picLocks noChangeAspect="1"/>
           </p:cNvPicPr>
@@ -3579,7 +3817,13 @@
       </p:sp>
       <p:sp>
         <p:nvSpPr>
-          <p:cNvPr id="14" name="Old box"/>
+          <p:cNvPr id="14" name="Old box">
+            <a:extLst>
+              <a:ext uri="{C183D7F6-B498-43B3-948B-1728B52AA6E4}">
+                <adec:decorative xmlns:adec="http://schemas.microsoft.com/office/drawing/2017/decorative" val="1"/>
+              </a:ext>
+            </a:extLst>
+          </p:cNvPr>
           <p:cNvSpPr/>
           <p:nvPr/>
         </p:nvSpPr>
@@ -3613,7 +3857,13 @@
       </p:sp>
       <p:sp>
         <p:nvSpPr>
-          <p:cNvPr id="15" name="Icon FaDoorOpen"/>
+          <p:cNvPr id="15" name="Icon FaDoorOpen">
+            <a:extLst>
+              <a:ext uri="{C183D7F6-B498-43B3-948B-1728B52AA6E4}">
+                <adec:decorative xmlns:adec="http://schemas.microsoft.com/office/drawing/2017/decorative" val="1"/>
+              </a:ext>
+            </a:extLst>
+          </p:cNvPr>
           <p:cNvSpPr/>
           <p:nvPr/>
         </p:nvSpPr>
@@ -3638,7 +3888,13 @@
       </p:sp>
       <p:pic>
         <p:nvPicPr>
-          <p:cNvPr id="16" name="Image 3" descr="C:\Users\whale\git\mwb-b04\presentations\_build\icons\FaDoorOpen.png"/>
+          <p:cNvPr id="16" name="Image 3">
+            <a:extLst>
+              <a:ext uri="{C183D7F6-B498-43B3-948B-1728B52AA6E4}">
+                <adec:decorative xmlns:adec="http://schemas.microsoft.com/office/drawing/2017/decorative" val="1"/>
+              </a:ext>
+            </a:extLst>
+          </p:cNvPr>
           <p:cNvPicPr>
             <a:picLocks noChangeAspect="1"/>
           </p:cNvPicPr>
@@ -3791,7 +4047,13 @@
       </p:sp>
       <p:sp>
         <p:nvSpPr>
-          <p:cNvPr id="19" name="Exclusions"/>
+          <p:cNvPr id="19" name="Exclusions">
+            <a:extLst>
+              <a:ext uri="{C183D7F6-B498-43B3-948B-1728B52AA6E4}">
+                <adec:decorative xmlns:adec="http://schemas.microsoft.com/office/drawing/2017/decorative" val="1"/>
+              </a:ext>
+            </a:extLst>
+          </p:cNvPr>
           <p:cNvSpPr/>
           <p:nvPr/>
         </p:nvSpPr>
@@ -3825,7 +4087,13 @@
       </p:sp>
       <p:sp>
         <p:nvSpPr>
-          <p:cNvPr id="20" name="Icon FaTriangleExclamation"/>
+          <p:cNvPr id="20" name="Icon FaTriangleExclamation">
+            <a:extLst>
+              <a:ext uri="{C183D7F6-B498-43B3-948B-1728B52AA6E4}">
+                <adec:decorative xmlns:adec="http://schemas.microsoft.com/office/drawing/2017/decorative" val="1"/>
+              </a:ext>
+            </a:extLst>
+          </p:cNvPr>
           <p:cNvSpPr/>
           <p:nvPr/>
         </p:nvSpPr>
@@ -3850,7 +4118,13 @@
       </p:sp>
       <p:pic>
         <p:nvPicPr>
-          <p:cNvPr id="21" name="Image 4" descr="C:\Users\whale\git\mwb-b04\presentations\_build\icons\FaTriangleExclamation.png"/>
+          <p:cNvPr id="21" name="Image 4">
+            <a:extLst>
+              <a:ext uri="{C183D7F6-B498-43B3-948B-1728B52AA6E4}">
+                <adec:decorative xmlns:adec="http://schemas.microsoft.com/office/drawing/2017/decorative" val="1"/>
+              </a:ext>
+            </a:extLst>
+          </p:cNvPr>
           <p:cNvPicPr>
             <a:picLocks noChangeAspect="1"/>
           </p:cNvPicPr>
@@ -3999,11 +4273,11 @@
       </p:sp>
       <p:pic>
         <p:nvPicPr>
-          <p:cNvPr id="24" name="Narration">
+          <p:cNvPr id="24" name="Narration" descr="Narration for this slide; captions available">
             <a:hlinkClick r:id="" action="ppaction://media"/>
             <a:extLst>
               <a:ext uri="{FF2B5EF4-FFF2-40B4-BE49-F238E27FC236}">
-                <a16:creationId xmlns:a16="http://schemas.microsoft.com/office/drawing/2014/main" id="{E5B68818-2EA7-9C13-CE8C-4D4D78790565}"/>
+                <a16:creationId xmlns:a16="http://schemas.microsoft.com/office/drawing/2014/main" id="{A4D5FF8D-9D1B-6492-7F81-55B7C19928DC}"/>
               </a:ext>
             </a:extLst>
           </p:cNvPr>
@@ -4014,7 +4288,17 @@
             <a:audioFile r:link="rId2"/>
             <p:extLst>
               <p:ext uri="{DAA4B4D4-6D71-4841-9C94-3DE7FCFB9230}">
-                <p14:media xmlns:p14="http://schemas.microsoft.com/office/powerpoint/2010/main" r:embed="rId1"/>
+                <p14:media xmlns:p14="http://schemas.microsoft.com/office/powerpoint/2010/main" r:embed="rId1">
+                  <p14:extLst>
+                    <p:ext uri="{3AFAAA56-56D3-431D-BCD4-E75A35582382}">
+                      <p173:tracksInfo xmlns:p173="http://schemas.microsoft.com/office/powerpoint/2017/3/main" displayLoc="slide">
+                        <p173:trackLst>
+                          <p173:track id="{AD3FF930-2A87-4455-BC13-FC81B10C0BEA}" label="English (captions)" lang="en-US" r:embed="rId11"/>
+                        </p173:trackLst>
+                      </p173:tracksInfo>
+                    </p:ext>
+                  </p14:extLst>
+                </p14:media>
               </p:ext>
             </p:extLst>
           </p:nvPr>
@@ -4181,7 +4465,13 @@
       </p:sp>
       <p:sp>
         <p:nvSpPr>
-          <p:cNvPr id="3" name="Tag Why"/>
+          <p:cNvPr id="3" name="Tag Why">
+            <a:extLst>
+              <a:ext uri="{C183D7F6-B498-43B3-948B-1728B52AA6E4}">
+                <adec:decorative xmlns:adec="http://schemas.microsoft.com/office/drawing/2017/decorative" val="1"/>
+              </a:ext>
+            </a:extLst>
+          </p:cNvPr>
           <p:cNvSpPr/>
           <p:nvPr/>
         </p:nvSpPr>
@@ -4244,7 +4534,13 @@
       </p:sp>
       <p:sp>
         <p:nvSpPr>
-          <p:cNvPr id="5" name="Col 0"/>
+          <p:cNvPr id="5" name="Col 0">
+            <a:extLst>
+              <a:ext uri="{C183D7F6-B498-43B3-948B-1728B52AA6E4}">
+                <adec:decorative xmlns:adec="http://schemas.microsoft.com/office/drawing/2017/decorative" val="1"/>
+              </a:ext>
+            </a:extLst>
+          </p:cNvPr>
           <p:cNvSpPr/>
           <p:nvPr/>
         </p:nvSpPr>
@@ -4393,7 +4689,13 @@
       </p:sp>
       <p:sp>
         <p:nvSpPr>
-          <p:cNvPr id="8" name="Col 1"/>
+          <p:cNvPr id="8" name="Col 1">
+            <a:extLst>
+              <a:ext uri="{C183D7F6-B498-43B3-948B-1728B52AA6E4}">
+                <adec:decorative xmlns:adec="http://schemas.microsoft.com/office/drawing/2017/decorative" val="1"/>
+              </a:ext>
+            </a:extLst>
+          </p:cNvPr>
           <p:cNvSpPr/>
           <p:nvPr/>
         </p:nvSpPr>
@@ -4542,7 +4844,13 @@
       </p:sp>
       <p:sp>
         <p:nvSpPr>
-          <p:cNvPr id="11" name="BG box"/>
+          <p:cNvPr id="11" name="BG box">
+            <a:extLst>
+              <a:ext uri="{C183D7F6-B498-43B3-948B-1728B52AA6E4}">
+                <adec:decorative xmlns:adec="http://schemas.microsoft.com/office/drawing/2017/decorative" val="1"/>
+              </a:ext>
+            </a:extLst>
+          </p:cNvPr>
           <p:cNvSpPr/>
           <p:nvPr/>
         </p:nvSpPr>
@@ -4576,7 +4884,13 @@
       </p:sp>
       <p:sp>
         <p:nvSpPr>
-          <p:cNvPr id="12" name="Icon FaKey"/>
+          <p:cNvPr id="12" name="Icon FaKey">
+            <a:extLst>
+              <a:ext uri="{C183D7F6-B498-43B3-948B-1728B52AA6E4}">
+                <adec:decorative xmlns:adec="http://schemas.microsoft.com/office/drawing/2017/decorative" val="1"/>
+              </a:ext>
+            </a:extLst>
+          </p:cNvPr>
           <p:cNvSpPr/>
           <p:nvPr/>
         </p:nvSpPr>
@@ -4601,7 +4915,13 @@
       </p:sp>
       <p:pic>
         <p:nvPicPr>
-          <p:cNvPr id="13" name="Image 0" descr="C:\Users\whale\git\mwb-b04\presentations\_build\icons\FaKey.png"/>
+          <p:cNvPr id="13" name="Image 0">
+            <a:extLst>
+              <a:ext uri="{C183D7F6-B498-43B3-948B-1728B52AA6E4}">
+                <adec:decorative xmlns:adec="http://schemas.microsoft.com/office/drawing/2017/decorative" val="1"/>
+              </a:ext>
+            </a:extLst>
+          </p:cNvPr>
           <p:cNvPicPr>
             <a:picLocks noChangeAspect="1"/>
           </p:cNvPicPr>
@@ -4700,7 +5020,13 @@
       </p:sp>
       <p:sp>
         <p:nvSpPr>
-          <p:cNvPr id="16" name="Evidence"/>
+          <p:cNvPr id="16" name="Evidence">
+            <a:extLst>
+              <a:ext uri="{C183D7F6-B498-43B3-948B-1728B52AA6E4}">
+                <adec:decorative xmlns:adec="http://schemas.microsoft.com/office/drawing/2017/decorative" val="1"/>
+              </a:ext>
+            </a:extLst>
+          </p:cNvPr>
           <p:cNvSpPr/>
           <p:nvPr/>
         </p:nvSpPr>
@@ -4734,7 +5060,13 @@
       </p:sp>
       <p:sp>
         <p:nvSpPr>
-          <p:cNvPr id="17" name="Icon FaShieldHalved"/>
+          <p:cNvPr id="17" name="Icon FaShieldHalved">
+            <a:extLst>
+              <a:ext uri="{C183D7F6-B498-43B3-948B-1728B52AA6E4}">
+                <adec:decorative xmlns:adec="http://schemas.microsoft.com/office/drawing/2017/decorative" val="1"/>
+              </a:ext>
+            </a:extLst>
+          </p:cNvPr>
           <p:cNvSpPr/>
           <p:nvPr/>
         </p:nvSpPr>
@@ -4759,7 +5091,13 @@
       </p:sp>
       <p:pic>
         <p:nvPicPr>
-          <p:cNvPr id="18" name="Image 1" descr="C:\Users\whale\git\mwb-b04\presentations\_build\icons\FaShieldHalved.png"/>
+          <p:cNvPr id="18" name="Image 1">
+            <a:extLst>
+              <a:ext uri="{C183D7F6-B498-43B3-948B-1728B52AA6E4}">
+                <adec:decorative xmlns:adec="http://schemas.microsoft.com/office/drawing/2017/decorative" val="1"/>
+              </a:ext>
+            </a:extLst>
+          </p:cNvPr>
           <p:cNvPicPr>
             <a:picLocks noChangeAspect="1"/>
           </p:cNvPicPr>
@@ -4908,11 +5246,11 @@
       </p:sp>
       <p:pic>
         <p:nvPicPr>
-          <p:cNvPr id="21" name="Narration">
+          <p:cNvPr id="21" name="Narration" descr="Narration for this slide; captions available">
             <a:hlinkClick r:id="" action="ppaction://media"/>
             <a:extLst>
               <a:ext uri="{FF2B5EF4-FFF2-40B4-BE49-F238E27FC236}">
-                <a16:creationId xmlns:a16="http://schemas.microsoft.com/office/drawing/2014/main" id="{46E31A73-530B-F1D5-A3CC-7E7304052E60}"/>
+                <a16:creationId xmlns:a16="http://schemas.microsoft.com/office/drawing/2014/main" id="{6B89FE61-4E13-AC56-E7A8-0A65EE084EAE}"/>
               </a:ext>
             </a:extLst>
           </p:cNvPr>
@@ -4923,7 +5261,17 @@
             <a:audioFile r:link="rId2"/>
             <p:extLst>
               <p:ext uri="{DAA4B4D4-6D71-4841-9C94-3DE7FCFB9230}">
-                <p14:media xmlns:p14="http://schemas.microsoft.com/office/powerpoint/2010/main" r:embed="rId1"/>
+                <p14:media xmlns:p14="http://schemas.microsoft.com/office/powerpoint/2010/main" r:embed="rId1">
+                  <p14:extLst>
+                    <p:ext uri="{3AFAAA56-56D3-431D-BCD4-E75A35582382}">
+                      <p173:tracksInfo xmlns:p173="http://schemas.microsoft.com/office/powerpoint/2017/3/main" displayLoc="slide">
+                        <p173:trackLst>
+                          <p173:track id="{AC5309E9-8E66-453A-88C2-B708347F2C57}" label="English (captions)" lang="en-US" r:embed="rId8"/>
+                        </p173:trackLst>
+                      </p173:tracksInfo>
+                    </p:ext>
+                  </p14:extLst>
+                </p14:media>
               </p:ext>
             </p:extLst>
           </p:nvPr>
@@ -5090,7 +5438,13 @@
       </p:sp>
       <p:sp>
         <p:nvSpPr>
-          <p:cNvPr id="3" name="Tag What"/>
+          <p:cNvPr id="3" name="Tag What">
+            <a:extLst>
+              <a:ext uri="{C183D7F6-B498-43B3-948B-1728B52AA6E4}">
+                <adec:decorative xmlns:adec="http://schemas.microsoft.com/office/drawing/2017/decorative" val="1"/>
+              </a:ext>
+            </a:extLst>
+          </p:cNvPr>
           <p:cNvSpPr/>
           <p:nvPr/>
         </p:nvSpPr>
@@ -5153,7 +5507,13 @@
       </p:sp>
       <p:sp>
         <p:nvSpPr>
-          <p:cNvPr id="5" name="Step 0"/>
+          <p:cNvPr id="5" name="Step 0">
+            <a:extLst>
+              <a:ext uri="{C183D7F6-B498-43B3-948B-1728B52AA6E4}">
+                <adec:decorative xmlns:adec="http://schemas.microsoft.com/office/drawing/2017/decorative" val="1"/>
+              </a:ext>
+            </a:extLst>
+          </p:cNvPr>
           <p:cNvSpPr/>
           <p:nvPr/>
         </p:nvSpPr>
@@ -5246,7 +5606,13 @@
       </p:sp>
       <p:sp>
         <p:nvSpPr>
-          <p:cNvPr id="7" name="Step 1"/>
+          <p:cNvPr id="7" name="Step 1">
+            <a:extLst>
+              <a:ext uri="{C183D7F6-B498-43B3-948B-1728B52AA6E4}">
+                <adec:decorative xmlns:adec="http://schemas.microsoft.com/office/drawing/2017/decorative" val="1"/>
+              </a:ext>
+            </a:extLst>
+          </p:cNvPr>
           <p:cNvSpPr/>
           <p:nvPr/>
         </p:nvSpPr>
@@ -5339,7 +5705,13 @@
       </p:sp>
       <p:sp>
         <p:nvSpPr>
-          <p:cNvPr id="9" name="Step 2"/>
+          <p:cNvPr id="9" name="Step 2">
+            <a:extLst>
+              <a:ext uri="{C183D7F6-B498-43B3-948B-1728B52AA6E4}">
+                <adec:decorative xmlns:adec="http://schemas.microsoft.com/office/drawing/2017/decorative" val="1"/>
+              </a:ext>
+            </a:extLst>
+          </p:cNvPr>
           <p:cNvSpPr/>
           <p:nvPr/>
         </p:nvSpPr>
@@ -5432,7 +5804,13 @@
       </p:sp>
       <p:sp>
         <p:nvSpPr>
-          <p:cNvPr id="11" name="Step 3"/>
+          <p:cNvPr id="11" name="Step 3">
+            <a:extLst>
+              <a:ext uri="{C183D7F6-B498-43B3-948B-1728B52AA6E4}">
+                <adec:decorative xmlns:adec="http://schemas.microsoft.com/office/drawing/2017/decorative" val="1"/>
+              </a:ext>
+            </a:extLst>
+          </p:cNvPr>
           <p:cNvSpPr/>
           <p:nvPr/>
         </p:nvSpPr>
@@ -5601,7 +5979,13 @@
       </p:sp>
       <p:sp>
         <p:nvSpPr>
-          <p:cNvPr id="14" name="Changed"/>
+          <p:cNvPr id="14" name="Changed">
+            <a:extLst>
+              <a:ext uri="{C183D7F6-B498-43B3-948B-1728B52AA6E4}">
+                <adec:decorative xmlns:adec="http://schemas.microsoft.com/office/drawing/2017/decorative" val="1"/>
+              </a:ext>
+            </a:extLst>
+          </p:cNvPr>
           <p:cNvSpPr/>
           <p:nvPr/>
         </p:nvSpPr>
@@ -5635,7 +6019,13 @@
       </p:sp>
       <p:sp>
         <p:nvSpPr>
-          <p:cNvPr id="15" name="Icon FaArrowsRotate"/>
+          <p:cNvPr id="15" name="Icon FaArrowsRotate">
+            <a:extLst>
+              <a:ext uri="{C183D7F6-B498-43B3-948B-1728B52AA6E4}">
+                <adec:decorative xmlns:adec="http://schemas.microsoft.com/office/drawing/2017/decorative" val="1"/>
+              </a:ext>
+            </a:extLst>
+          </p:cNvPr>
           <p:cNvSpPr/>
           <p:nvPr/>
         </p:nvSpPr>
@@ -5660,7 +6050,13 @@
       </p:sp>
       <p:pic>
         <p:nvPicPr>
-          <p:cNvPr id="16" name="Image 0" descr="C:\Users\whale\git\mwb-b04\presentations\_build\icons\FaArrowsRotate.png"/>
+          <p:cNvPr id="16" name="Image 0">
+            <a:extLst>
+              <a:ext uri="{C183D7F6-B498-43B3-948B-1728B52AA6E4}">
+                <adec:decorative xmlns:adec="http://schemas.microsoft.com/office/drawing/2017/decorative" val="1"/>
+              </a:ext>
+            </a:extLst>
+          </p:cNvPr>
           <p:cNvPicPr>
             <a:picLocks noChangeAspect="1"/>
           </p:cNvPicPr>
@@ -5809,11 +6205,11 @@
       </p:sp>
       <p:pic>
         <p:nvPicPr>
-          <p:cNvPr id="19" name="Narration">
+          <p:cNvPr id="19" name="Narration" descr="Narration for this slide; captions available">
             <a:hlinkClick r:id="" action="ppaction://media"/>
             <a:extLst>
               <a:ext uri="{FF2B5EF4-FFF2-40B4-BE49-F238E27FC236}">
-                <a16:creationId xmlns:a16="http://schemas.microsoft.com/office/drawing/2014/main" id="{052D2D01-41BC-1427-E2DC-467838E8011C}"/>
+                <a16:creationId xmlns:a16="http://schemas.microsoft.com/office/drawing/2014/main" id="{EACD625D-8FC6-BF63-5DFF-BD0C25883E24}"/>
               </a:ext>
             </a:extLst>
           </p:cNvPr>
@@ -5824,7 +6220,17 @@
             <a:audioFile r:link="rId2"/>
             <p:extLst>
               <p:ext uri="{DAA4B4D4-6D71-4841-9C94-3DE7FCFB9230}">
-                <p14:media xmlns:p14="http://schemas.microsoft.com/office/powerpoint/2010/main" r:embed="rId1"/>
+                <p14:media xmlns:p14="http://schemas.microsoft.com/office/powerpoint/2010/main" r:embed="rId1">
+                  <p14:extLst>
+                    <p:ext uri="{3AFAAA56-56D3-431D-BCD4-E75A35582382}">
+                      <p173:tracksInfo xmlns:p173="http://schemas.microsoft.com/office/powerpoint/2017/3/main" displayLoc="slide">
+                        <p173:trackLst>
+                          <p173:track id="{DE923868-DD21-4E99-83C8-B73E87D6350D}" label="English (captions)" lang="en-US" r:embed="rId7"/>
+                        </p173:trackLst>
+                      </p173:tracksInfo>
+                    </p:ext>
+                  </p14:extLst>
+                </p14:media>
               </p:ext>
             </p:extLst>
           </p:nvPr>
@@ -5991,7 +6397,13 @@
       </p:sp>
       <p:sp>
         <p:nvSpPr>
-          <p:cNvPr id="3" name="Tag What"/>
+          <p:cNvPr id="3" name="Tag What">
+            <a:extLst>
+              <a:ext uri="{C183D7F6-B498-43B3-948B-1728B52AA6E4}">
+                <adec:decorative xmlns:adec="http://schemas.microsoft.com/office/drawing/2017/decorative" val="1"/>
+              </a:ext>
+            </a:extLst>
+          </p:cNvPr>
           <p:cNvSpPr/>
           <p:nvPr/>
         </p:nvSpPr>
@@ -6054,7 +6466,13 @@
       </p:sp>
       <p:sp>
         <p:nvSpPr>
-          <p:cNvPr id="5" name="Col 0"/>
+          <p:cNvPr id="5" name="Col 0">
+            <a:extLst>
+              <a:ext uri="{C183D7F6-B498-43B3-948B-1728B52AA6E4}">
+                <adec:decorative xmlns:adec="http://schemas.microsoft.com/office/drawing/2017/decorative" val="1"/>
+              </a:ext>
+            </a:extLst>
+          </p:cNvPr>
           <p:cNvSpPr/>
           <p:nvPr/>
         </p:nvSpPr>
@@ -6088,7 +6506,13 @@
       </p:sp>
       <p:sp>
         <p:nvSpPr>
-          <p:cNvPr id="6" name="Icon FaUserShield"/>
+          <p:cNvPr id="6" name="Icon FaUserShield">
+            <a:extLst>
+              <a:ext uri="{C183D7F6-B498-43B3-948B-1728B52AA6E4}">
+                <adec:decorative xmlns:adec="http://schemas.microsoft.com/office/drawing/2017/decorative" val="1"/>
+              </a:ext>
+            </a:extLst>
+          </p:cNvPr>
           <p:cNvSpPr/>
           <p:nvPr/>
         </p:nvSpPr>
@@ -6113,7 +6537,13 @@
       </p:sp>
       <p:pic>
         <p:nvPicPr>
-          <p:cNvPr id="7" name="Image 0" descr="C:\Users\whale\git\mwb-b04\presentations\_build\icons\FaUserShield.png"/>
+          <p:cNvPr id="7" name="Image 0">
+            <a:extLst>
+              <a:ext uri="{C183D7F6-B498-43B3-948B-1728B52AA6E4}">
+                <adec:decorative xmlns:adec="http://schemas.microsoft.com/office/drawing/2017/decorative" val="1"/>
+              </a:ext>
+            </a:extLst>
+          </p:cNvPr>
           <p:cNvPicPr>
             <a:picLocks noChangeAspect="1"/>
           </p:cNvPicPr>
@@ -6270,7 +6700,13 @@
       </p:sp>
       <p:sp>
         <p:nvSpPr>
-          <p:cNvPr id="10" name="Col 1"/>
+          <p:cNvPr id="10" name="Col 1">
+            <a:extLst>
+              <a:ext uri="{C183D7F6-B498-43B3-948B-1728B52AA6E4}">
+                <adec:decorative xmlns:adec="http://schemas.microsoft.com/office/drawing/2017/decorative" val="1"/>
+              </a:ext>
+            </a:extLst>
+          </p:cNvPr>
           <p:cNvSpPr/>
           <p:nvPr/>
         </p:nvSpPr>
@@ -6304,7 +6740,13 @@
       </p:sp>
       <p:sp>
         <p:nvSpPr>
-          <p:cNvPr id="11" name="Icon FaCubes"/>
+          <p:cNvPr id="11" name="Icon FaCubes">
+            <a:extLst>
+              <a:ext uri="{C183D7F6-B498-43B3-948B-1728B52AA6E4}">
+                <adec:decorative xmlns:adec="http://schemas.microsoft.com/office/drawing/2017/decorative" val="1"/>
+              </a:ext>
+            </a:extLst>
+          </p:cNvPr>
           <p:cNvSpPr/>
           <p:nvPr/>
         </p:nvSpPr>
@@ -6329,7 +6771,13 @@
       </p:sp>
       <p:pic>
         <p:nvPicPr>
-          <p:cNvPr id="12" name="Image 1" descr="C:\Users\whale\git\mwb-b04\presentations\_build\icons\FaCubes.png"/>
+          <p:cNvPr id="12" name="Image 1">
+            <a:extLst>
+              <a:ext uri="{C183D7F6-B498-43B3-948B-1728B52AA6E4}">
+                <adec:decorative xmlns:adec="http://schemas.microsoft.com/office/drawing/2017/decorative" val="1"/>
+              </a:ext>
+            </a:extLst>
+          </p:cNvPr>
           <p:cNvPicPr>
             <a:picLocks noChangeAspect="1"/>
           </p:cNvPicPr>
@@ -6486,7 +6934,13 @@
       </p:sp>
       <p:sp>
         <p:nvSpPr>
-          <p:cNvPr id="15" name="Grants"/>
+          <p:cNvPr id="15" name="Grants">
+            <a:extLst>
+              <a:ext uri="{C183D7F6-B498-43B3-948B-1728B52AA6E4}">
+                <adec:decorative xmlns:adec="http://schemas.microsoft.com/office/drawing/2017/decorative" val="1"/>
+              </a:ext>
+            </a:extLst>
+          </p:cNvPr>
           <p:cNvSpPr/>
           <p:nvPr/>
         </p:nvSpPr>
@@ -6520,7 +6974,13 @@
       </p:sp>
       <p:sp>
         <p:nvSpPr>
-          <p:cNvPr id="16" name="Icon FaTriangleExclamation"/>
+          <p:cNvPr id="16" name="Icon FaTriangleExclamation">
+            <a:extLst>
+              <a:ext uri="{C183D7F6-B498-43B3-948B-1728B52AA6E4}">
+                <adec:decorative xmlns:adec="http://schemas.microsoft.com/office/drawing/2017/decorative" val="1"/>
+              </a:ext>
+            </a:extLst>
+          </p:cNvPr>
           <p:cNvSpPr/>
           <p:nvPr/>
         </p:nvSpPr>
@@ -6545,7 +7005,13 @@
       </p:sp>
       <p:pic>
         <p:nvPicPr>
-          <p:cNvPr id="17" name="Image 2" descr="C:\Users\whale\git\mwb-b04\presentations\_build\icons\FaTriangleExclamation.png"/>
+          <p:cNvPr id="17" name="Image 2">
+            <a:extLst>
+              <a:ext uri="{C183D7F6-B498-43B3-948B-1728B52AA6E4}">
+                <adec:decorative xmlns:adec="http://schemas.microsoft.com/office/drawing/2017/decorative" val="1"/>
+              </a:ext>
+            </a:extLst>
+          </p:cNvPr>
           <p:cNvPicPr>
             <a:picLocks noChangeAspect="1"/>
           </p:cNvPicPr>
@@ -6694,11 +7160,11 @@
       </p:sp>
       <p:pic>
         <p:nvPicPr>
-          <p:cNvPr id="20" name="Narration">
+          <p:cNvPr id="20" name="Narration" descr="Narration for this slide; captions available">
             <a:hlinkClick r:id="" action="ppaction://media"/>
             <a:extLst>
               <a:ext uri="{FF2B5EF4-FFF2-40B4-BE49-F238E27FC236}">
-                <a16:creationId xmlns:a16="http://schemas.microsoft.com/office/drawing/2014/main" id="{B5C84B3C-C7FA-F01C-680A-872C121486AF}"/>
+                <a16:creationId xmlns:a16="http://schemas.microsoft.com/office/drawing/2014/main" id="{EB16083A-B9A2-1A67-09F5-5F4F66E7CBB6}"/>
               </a:ext>
             </a:extLst>
           </p:cNvPr>
@@ -6709,7 +7175,17 @@
             <a:audioFile r:link="rId2"/>
             <p:extLst>
               <p:ext uri="{DAA4B4D4-6D71-4841-9C94-3DE7FCFB9230}">
-                <p14:media xmlns:p14="http://schemas.microsoft.com/office/powerpoint/2010/main" r:embed="rId1"/>
+                <p14:media xmlns:p14="http://schemas.microsoft.com/office/powerpoint/2010/main" r:embed="rId1">
+                  <p14:extLst>
+                    <p:ext uri="{3AFAAA56-56D3-431D-BCD4-E75A35582382}">
+                      <p173:tracksInfo xmlns:p173="http://schemas.microsoft.com/office/powerpoint/2017/3/main" displayLoc="slide">
+                        <p173:trackLst>
+                          <p173:track id="{9D4B7C87-1B1B-4300-A2F2-28845576B5DF}" label="English (captions)" lang="en-US" r:embed="rId9"/>
+                        </p173:trackLst>
+                      </p173:tracksInfo>
+                    </p:ext>
+                  </p14:extLst>
+                </p14:media>
               </p:ext>
             </p:extLst>
           </p:nvPr>
@@ -6876,7 +7352,13 @@
       </p:sp>
       <p:sp>
         <p:nvSpPr>
-          <p:cNvPr id="3" name="Tag Who"/>
+          <p:cNvPr id="3" name="Tag Who">
+            <a:extLst>
+              <a:ext uri="{C183D7F6-B498-43B3-948B-1728B52AA6E4}">
+                <adec:decorative xmlns:adec="http://schemas.microsoft.com/office/drawing/2017/decorative" val="1"/>
+              </a:ext>
+            </a:extLst>
+          </p:cNvPr>
           <p:cNvSpPr/>
           <p:nvPr/>
         </p:nvSpPr>
@@ -6939,7 +7421,13 @@
       </p:sp>
       <p:sp>
         <p:nvSpPr>
-          <p:cNvPr id="5" name="Who col 1"/>
+          <p:cNvPr id="5" name="Who col 1">
+            <a:extLst>
+              <a:ext uri="{C183D7F6-B498-43B3-948B-1728B52AA6E4}">
+                <adec:decorative xmlns:adec="http://schemas.microsoft.com/office/drawing/2017/decorative" val="1"/>
+              </a:ext>
+            </a:extLst>
+          </p:cNvPr>
           <p:cNvSpPr/>
           <p:nvPr/>
         </p:nvSpPr>
@@ -6973,7 +7461,13 @@
       </p:sp>
       <p:sp>
         <p:nvSpPr>
-          <p:cNvPr id="6" name="Icon FaBuildingColumns"/>
+          <p:cNvPr id="6" name="Icon FaBuildingColumns">
+            <a:extLst>
+              <a:ext uri="{C183D7F6-B498-43B3-948B-1728B52AA6E4}">
+                <adec:decorative xmlns:adec="http://schemas.microsoft.com/office/drawing/2017/decorative" val="1"/>
+              </a:ext>
+            </a:extLst>
+          </p:cNvPr>
           <p:cNvSpPr/>
           <p:nvPr/>
         </p:nvSpPr>
@@ -6998,7 +7492,13 @@
       </p:sp>
       <p:pic>
         <p:nvPicPr>
-          <p:cNvPr id="7" name="Image 0" descr="C:\Users\whale\git\mwb-b04\presentations\_build\icons\FaBuildingColumns.png"/>
+          <p:cNvPr id="7" name="Image 0">
+            <a:extLst>
+              <a:ext uri="{C183D7F6-B498-43B3-948B-1728B52AA6E4}">
+                <adec:decorative xmlns:adec="http://schemas.microsoft.com/office/drawing/2017/decorative" val="1"/>
+              </a:ext>
+            </a:extLst>
+          </p:cNvPr>
           <p:cNvPicPr>
             <a:picLocks noChangeAspect="1"/>
           </p:cNvPicPr>
@@ -7185,7 +7685,13 @@
       </p:sp>
       <p:sp>
         <p:nvSpPr>
-          <p:cNvPr id="10" name="Who col 2"/>
+          <p:cNvPr id="10" name="Who col 2">
+            <a:extLst>
+              <a:ext uri="{C183D7F6-B498-43B3-948B-1728B52AA6E4}">
+                <adec:decorative xmlns:adec="http://schemas.microsoft.com/office/drawing/2017/decorative" val="1"/>
+              </a:ext>
+            </a:extLst>
+          </p:cNvPr>
           <p:cNvSpPr/>
           <p:nvPr/>
         </p:nvSpPr>
@@ -7219,7 +7725,13 @@
       </p:sp>
       <p:sp>
         <p:nvSpPr>
-          <p:cNvPr id="11" name="Icon FaUsersGear"/>
+          <p:cNvPr id="11" name="Icon FaUsersGear">
+            <a:extLst>
+              <a:ext uri="{C183D7F6-B498-43B3-948B-1728B52AA6E4}">
+                <adec:decorative xmlns:adec="http://schemas.microsoft.com/office/drawing/2017/decorative" val="1"/>
+              </a:ext>
+            </a:extLst>
+          </p:cNvPr>
           <p:cNvSpPr/>
           <p:nvPr/>
         </p:nvSpPr>
@@ -7244,7 +7756,13 @@
       </p:sp>
       <p:pic>
         <p:nvPicPr>
-          <p:cNvPr id="12" name="Image 1" descr="C:\Users\whale\git\mwb-b04\presentations\_build\icons\FaUsersGear.png"/>
+          <p:cNvPr id="12" name="Image 1">
+            <a:extLst>
+              <a:ext uri="{C183D7F6-B498-43B3-948B-1728B52AA6E4}">
+                <adec:decorative xmlns:adec="http://schemas.microsoft.com/office/drawing/2017/decorative" val="1"/>
+              </a:ext>
+            </a:extLst>
+          </p:cNvPr>
           <p:cNvPicPr>
             <a:picLocks noChangeAspect="1"/>
           </p:cNvPicPr>
@@ -7431,7 +7949,13 @@
       </p:sp>
       <p:sp>
         <p:nvSpPr>
-          <p:cNvPr id="15" name="Who col 3"/>
+          <p:cNvPr id="15" name="Who col 3">
+            <a:extLst>
+              <a:ext uri="{C183D7F6-B498-43B3-948B-1728B52AA6E4}">
+                <adec:decorative xmlns:adec="http://schemas.microsoft.com/office/drawing/2017/decorative" val="1"/>
+              </a:ext>
+            </a:extLst>
+          </p:cNvPr>
           <p:cNvSpPr/>
           <p:nvPr/>
         </p:nvSpPr>
@@ -7465,7 +7989,13 @@
       </p:sp>
       <p:sp>
         <p:nvSpPr>
-          <p:cNvPr id="16" name="Icon FaShieldHalved"/>
+          <p:cNvPr id="16" name="Icon FaShieldHalved">
+            <a:extLst>
+              <a:ext uri="{C183D7F6-B498-43B3-948B-1728B52AA6E4}">
+                <adec:decorative xmlns:adec="http://schemas.microsoft.com/office/drawing/2017/decorative" val="1"/>
+              </a:ext>
+            </a:extLst>
+          </p:cNvPr>
           <p:cNvSpPr/>
           <p:nvPr/>
         </p:nvSpPr>
@@ -7490,7 +8020,13 @@
       </p:sp>
       <p:pic>
         <p:nvPicPr>
-          <p:cNvPr id="17" name="Image 2" descr="C:\Users\whale\git\mwb-b04\presentations\_build\icons\FaShieldHalved.png"/>
+          <p:cNvPr id="17" name="Image 2">
+            <a:extLst>
+              <a:ext uri="{C183D7F6-B498-43B3-948B-1728B52AA6E4}">
+                <adec:decorative xmlns:adec="http://schemas.microsoft.com/office/drawing/2017/decorative" val="1"/>
+              </a:ext>
+            </a:extLst>
+          </p:cNvPr>
           <p:cNvPicPr>
             <a:picLocks noChangeAspect="1"/>
           </p:cNvPicPr>
@@ -7677,7 +8213,13 @@
       </p:sp>
       <p:sp>
         <p:nvSpPr>
-          <p:cNvPr id="20" name="Split"/>
+          <p:cNvPr id="20" name="Split">
+            <a:extLst>
+              <a:ext uri="{C183D7F6-B498-43B3-948B-1728B52AA6E4}">
+                <adec:decorative xmlns:adec="http://schemas.microsoft.com/office/drawing/2017/decorative" val="1"/>
+              </a:ext>
+            </a:extLst>
+          </p:cNvPr>
           <p:cNvSpPr/>
           <p:nvPr/>
         </p:nvSpPr>
@@ -7711,7 +8253,13 @@
       </p:sp>
       <p:sp>
         <p:nvSpPr>
-          <p:cNvPr id="21" name="Icon FaPeopleArrows"/>
+          <p:cNvPr id="21" name="Icon FaPeopleArrows">
+            <a:extLst>
+              <a:ext uri="{C183D7F6-B498-43B3-948B-1728B52AA6E4}">
+                <adec:decorative xmlns:adec="http://schemas.microsoft.com/office/drawing/2017/decorative" val="1"/>
+              </a:ext>
+            </a:extLst>
+          </p:cNvPr>
           <p:cNvSpPr/>
           <p:nvPr/>
         </p:nvSpPr>
@@ -7736,7 +8284,13 @@
       </p:sp>
       <p:pic>
         <p:nvPicPr>
-          <p:cNvPr id="22" name="Image 3" descr="C:\Users\whale\git\mwb-b04\presentations\_build\icons\FaPeopleArrows.png"/>
+          <p:cNvPr id="22" name="Image 3">
+            <a:extLst>
+              <a:ext uri="{C183D7F6-B498-43B3-948B-1728B52AA6E4}">
+                <adec:decorative xmlns:adec="http://schemas.microsoft.com/office/drawing/2017/decorative" val="1"/>
+              </a:ext>
+            </a:extLst>
+          </p:cNvPr>
           <p:cNvPicPr>
             <a:picLocks noChangeAspect="1"/>
           </p:cNvPicPr>
@@ -7885,11 +8439,11 @@
       </p:sp>
       <p:pic>
         <p:nvPicPr>
-          <p:cNvPr id="26" name="Narration">
+          <p:cNvPr id="26" name="Narration" descr="Narration for this slide; captions available">
             <a:hlinkClick r:id="" action="ppaction://media"/>
             <a:extLst>
               <a:ext uri="{FF2B5EF4-FFF2-40B4-BE49-F238E27FC236}">
-                <a16:creationId xmlns:a16="http://schemas.microsoft.com/office/drawing/2014/main" id="{D69137B7-9A25-CBEF-583E-348900E65257}"/>
+                <a16:creationId xmlns:a16="http://schemas.microsoft.com/office/drawing/2014/main" id="{3A1E7BD8-4337-EF36-7E96-2E69FCD7C1DD}"/>
               </a:ext>
             </a:extLst>
           </p:cNvPr>
@@ -7900,7 +8454,17 @@
             <a:audioFile r:link="rId2"/>
             <p:extLst>
               <p:ext uri="{DAA4B4D4-6D71-4841-9C94-3DE7FCFB9230}">
-                <p14:media xmlns:p14="http://schemas.microsoft.com/office/powerpoint/2010/main" r:embed="rId1"/>
+                <p14:media xmlns:p14="http://schemas.microsoft.com/office/powerpoint/2010/main" r:embed="rId1">
+                  <p14:extLst>
+                    <p:ext uri="{3AFAAA56-56D3-431D-BCD4-E75A35582382}">
+                      <p173:tracksInfo xmlns:p173="http://schemas.microsoft.com/office/powerpoint/2017/3/main" displayLoc="slide">
+                        <p173:trackLst>
+                          <p173:track id="{09CA3012-7339-490C-8A65-A68B5C13102D}" label="English (captions)" lang="en-US" r:embed="rId10"/>
+                        </p173:trackLst>
+                      </p173:tracksInfo>
+                    </p:ext>
+                  </p14:extLst>
+                </p14:media>
               </p:ext>
             </p:extLst>
           </p:nvPr>
@@ -8067,7 +8631,13 @@
       </p:sp>
       <p:sp>
         <p:nvSpPr>
-          <p:cNvPr id="3" name="Tag How"/>
+          <p:cNvPr id="3" name="Tag How">
+            <a:extLst>
+              <a:ext uri="{C183D7F6-B498-43B3-948B-1728B52AA6E4}">
+                <adec:decorative xmlns:adec="http://schemas.microsoft.com/office/drawing/2017/decorative" val="1"/>
+              </a:ext>
+            </a:extLst>
+          </p:cNvPr>
           <p:cNvSpPr/>
           <p:nvPr/>
         </p:nvSpPr>
@@ -8130,7 +8700,13 @@
       </p:sp>
       <p:sp>
         <p:nvSpPr>
-          <p:cNvPr id="5" name="Wave 0"/>
+          <p:cNvPr id="5" name="Wave 0">
+            <a:extLst>
+              <a:ext uri="{C183D7F6-B498-43B3-948B-1728B52AA6E4}">
+                <adec:decorative xmlns:adec="http://schemas.microsoft.com/office/drawing/2017/decorative" val="1"/>
+              </a:ext>
+            </a:extLst>
+          </p:cNvPr>
           <p:cNvSpPr/>
           <p:nvPr/>
         </p:nvSpPr>
@@ -8240,7 +8816,13 @@
       </p:sp>
       <p:sp>
         <p:nvSpPr>
-          <p:cNvPr id="7" name="Wave 1"/>
+          <p:cNvPr id="7" name="Wave 1">
+            <a:extLst>
+              <a:ext uri="{C183D7F6-B498-43B3-948B-1728B52AA6E4}">
+                <adec:decorative xmlns:adec="http://schemas.microsoft.com/office/drawing/2017/decorative" val="1"/>
+              </a:ext>
+            </a:extLst>
+          </p:cNvPr>
           <p:cNvSpPr/>
           <p:nvPr/>
         </p:nvSpPr>
@@ -8350,7 +8932,13 @@
       </p:sp>
       <p:sp>
         <p:nvSpPr>
-          <p:cNvPr id="9" name="Wave 2"/>
+          <p:cNvPr id="9" name="Wave 2">
+            <a:extLst>
+              <a:ext uri="{C183D7F6-B498-43B3-948B-1728B52AA6E4}">
+                <adec:decorative xmlns:adec="http://schemas.microsoft.com/office/drawing/2017/decorative" val="1"/>
+              </a:ext>
+            </a:extLst>
+          </p:cNvPr>
           <p:cNvSpPr/>
           <p:nvPr/>
         </p:nvSpPr>
@@ -8460,7 +9048,13 @@
       </p:sp>
       <p:sp>
         <p:nvSpPr>
-          <p:cNvPr id="11" name="Wave 3"/>
+          <p:cNvPr id="11" name="Wave 3">
+            <a:extLst>
+              <a:ext uri="{C183D7F6-B498-43B3-948B-1728B52AA6E4}">
+                <adec:decorative xmlns:adec="http://schemas.microsoft.com/office/drawing/2017/decorative" val="1"/>
+              </a:ext>
+            </a:extLst>
+          </p:cNvPr>
           <p:cNvSpPr/>
           <p:nvPr/>
         </p:nvSpPr>
@@ -8570,7 +9164,13 @@
       </p:sp>
       <p:sp>
         <p:nvSpPr>
-          <p:cNvPr id="13" name="Wave 4"/>
+          <p:cNvPr id="13" name="Wave 4">
+            <a:extLst>
+              <a:ext uri="{C183D7F6-B498-43B3-948B-1728B52AA6E4}">
+                <adec:decorative xmlns:adec="http://schemas.microsoft.com/office/drawing/2017/decorative" val="1"/>
+              </a:ext>
+            </a:extLst>
+          </p:cNvPr>
           <p:cNvSpPr/>
           <p:nvPr/>
         </p:nvSpPr>
@@ -8724,7 +9324,13 @@
       </p:sp>
       <p:sp>
         <p:nvSpPr>
-          <p:cNvPr id="16" name="BOD"/>
+          <p:cNvPr id="16" name="BOD">
+            <a:extLst>
+              <a:ext uri="{C183D7F6-B498-43B3-948B-1728B52AA6E4}">
+                <adec:decorative xmlns:adec="http://schemas.microsoft.com/office/drawing/2017/decorative" val="1"/>
+              </a:ext>
+            </a:extLst>
+          </p:cNvPr>
           <p:cNvSpPr/>
           <p:nvPr/>
         </p:nvSpPr>
@@ -8758,7 +9364,13 @@
       </p:sp>
       <p:sp>
         <p:nvSpPr>
-          <p:cNvPr id="17" name="Icon FaListCheck"/>
+          <p:cNvPr id="17" name="Icon FaListCheck">
+            <a:extLst>
+              <a:ext uri="{C183D7F6-B498-43B3-948B-1728B52AA6E4}">
+                <adec:decorative xmlns:adec="http://schemas.microsoft.com/office/drawing/2017/decorative" val="1"/>
+              </a:ext>
+            </a:extLst>
+          </p:cNvPr>
           <p:cNvSpPr/>
           <p:nvPr/>
         </p:nvSpPr>
@@ -8783,7 +9395,13 @@
       </p:sp>
       <p:pic>
         <p:nvPicPr>
-          <p:cNvPr id="18" name="Image 0" descr="C:\Users\whale\git\mwb-b04\presentations\_build\icons\FaListCheck.png"/>
+          <p:cNvPr id="18" name="Image 0">
+            <a:extLst>
+              <a:ext uri="{C183D7F6-B498-43B3-948B-1728B52AA6E4}">
+                <adec:decorative xmlns:adec="http://schemas.microsoft.com/office/drawing/2017/decorative" val="1"/>
+              </a:ext>
+            </a:extLst>
+          </p:cNvPr>
           <p:cNvPicPr>
             <a:picLocks noChangeAspect="1"/>
           </p:cNvPicPr>
@@ -8932,11 +9550,11 @@
       </p:sp>
       <p:pic>
         <p:nvPicPr>
-          <p:cNvPr id="21" name="Narration">
+          <p:cNvPr id="21" name="Narration" descr="Narration for this slide; captions available">
             <a:hlinkClick r:id="" action="ppaction://media"/>
             <a:extLst>
               <a:ext uri="{FF2B5EF4-FFF2-40B4-BE49-F238E27FC236}">
-                <a16:creationId xmlns:a16="http://schemas.microsoft.com/office/drawing/2014/main" id="{BF4E0EDC-75EF-9E80-EACD-450E9A1EC138}"/>
+                <a16:creationId xmlns:a16="http://schemas.microsoft.com/office/drawing/2014/main" id="{0BB8CE59-0C00-900B-C962-9C9982053CB6}"/>
               </a:ext>
             </a:extLst>
           </p:cNvPr>
@@ -8947,7 +9565,17 @@
             <a:audioFile r:link="rId2"/>
             <p:extLst>
               <p:ext uri="{DAA4B4D4-6D71-4841-9C94-3DE7FCFB9230}">
-                <p14:media xmlns:p14="http://schemas.microsoft.com/office/powerpoint/2010/main" r:embed="rId1"/>
+                <p14:media xmlns:p14="http://schemas.microsoft.com/office/powerpoint/2010/main" r:embed="rId1">
+                  <p14:extLst>
+                    <p:ext uri="{3AFAAA56-56D3-431D-BCD4-E75A35582382}">
+                      <p173:tracksInfo xmlns:p173="http://schemas.microsoft.com/office/powerpoint/2017/3/main" displayLoc="slide">
+                        <p173:trackLst>
+                          <p173:track id="{7AA457CD-7774-4906-A9C2-AC6E77198DBA}" label="English (captions)" lang="en-US" r:embed="rId7"/>
+                        </p173:trackLst>
+                      </p173:tracksInfo>
+                    </p:ext>
+                  </p14:extLst>
+                </p14:media>
               </p:ext>
             </p:extLst>
           </p:nvPr>
@@ -9114,7 +9742,13 @@
       </p:sp>
       <p:sp>
         <p:nvSpPr>
-          <p:cNvPr id="3" name="Tag How"/>
+          <p:cNvPr id="3" name="Tag How">
+            <a:extLst>
+              <a:ext uri="{C183D7F6-B498-43B3-948B-1728B52AA6E4}">
+                <adec:decorative xmlns:adec="http://schemas.microsoft.com/office/drawing/2017/decorative" val="1"/>
+              </a:ext>
+            </a:extLst>
+          </p:cNvPr>
           <p:cNvSpPr/>
           <p:nvPr/>
         </p:nvSpPr>
@@ -9177,7 +9811,13 @@
       </p:sp>
       <p:sp>
         <p:nvSpPr>
-          <p:cNvPr id="5" name="PIM 0"/>
+          <p:cNvPr id="5" name="PIM 0">
+            <a:extLst>
+              <a:ext uri="{C183D7F6-B498-43B3-948B-1728B52AA6E4}">
+                <adec:decorative xmlns:adec="http://schemas.microsoft.com/office/drawing/2017/decorative" val="1"/>
+              </a:ext>
+            </a:extLst>
+          </p:cNvPr>
           <p:cNvSpPr/>
           <p:nvPr/>
         </p:nvSpPr>
@@ -9264,7 +9904,13 @@
       </p:sp>
       <p:sp>
         <p:nvSpPr>
-          <p:cNvPr id="7" name="PIM 1"/>
+          <p:cNvPr id="7" name="PIM 1">
+            <a:extLst>
+              <a:ext uri="{C183D7F6-B498-43B3-948B-1728B52AA6E4}">
+                <adec:decorative xmlns:adec="http://schemas.microsoft.com/office/drawing/2017/decorative" val="1"/>
+              </a:ext>
+            </a:extLst>
+          </p:cNvPr>
           <p:cNvSpPr/>
           <p:nvPr/>
         </p:nvSpPr>
@@ -9351,7 +9997,13 @@
       </p:sp>
       <p:sp>
         <p:nvSpPr>
-          <p:cNvPr id="9" name="PIM 2"/>
+          <p:cNvPr id="9" name="PIM 2">
+            <a:extLst>
+              <a:ext uri="{C183D7F6-B498-43B3-948B-1728B52AA6E4}">
+                <adec:decorative xmlns:adec="http://schemas.microsoft.com/office/drawing/2017/decorative" val="1"/>
+              </a:ext>
+            </a:extLst>
+          </p:cNvPr>
           <p:cNvSpPr/>
           <p:nvPr/>
         </p:nvSpPr>
@@ -9438,7 +10090,13 @@
       </p:sp>
       <p:sp>
         <p:nvSpPr>
-          <p:cNvPr id="11" name="PIM 3"/>
+          <p:cNvPr id="11" name="PIM 3">
+            <a:extLst>
+              <a:ext uri="{C183D7F6-B498-43B3-948B-1728B52AA6E4}">
+                <adec:decorative xmlns:adec="http://schemas.microsoft.com/office/drawing/2017/decorative" val="1"/>
+              </a:ext>
+            </a:extLst>
+          </p:cNvPr>
           <p:cNvSpPr/>
           <p:nvPr/>
         </p:nvSpPr>
@@ -9525,7 +10183,13 @@
       </p:sp>
       <p:sp>
         <p:nvSpPr>
-          <p:cNvPr id="13" name="PIM 4"/>
+          <p:cNvPr id="13" name="PIM 4">
+            <a:extLst>
+              <a:ext uri="{C183D7F6-B498-43B3-948B-1728B52AA6E4}">
+                <adec:decorative xmlns:adec="http://schemas.microsoft.com/office/drawing/2017/decorative" val="1"/>
+              </a:ext>
+            </a:extLst>
+          </p:cNvPr>
           <p:cNvSpPr/>
           <p:nvPr/>
         </p:nvSpPr>
@@ -9612,7 +10276,13 @@
       </p:sp>
       <p:sp>
         <p:nvSpPr>
-          <p:cNvPr id="15" name="PIM 5"/>
+          <p:cNvPr id="15" name="PIM 5">
+            <a:extLst>
+              <a:ext uri="{C183D7F6-B498-43B3-948B-1728B52AA6E4}">
+                <adec:decorative xmlns:adec="http://schemas.microsoft.com/office/drawing/2017/decorative" val="1"/>
+              </a:ext>
+            </a:extLst>
+          </p:cNvPr>
           <p:cNvSpPr/>
           <p:nvPr/>
         </p:nvSpPr>
@@ -9793,7 +10463,13 @@
       </p:sp>
       <p:sp>
         <p:nvSpPr>
-          <p:cNvPr id="18" name="Settings"/>
+          <p:cNvPr id="18" name="Settings">
+            <a:extLst>
+              <a:ext uri="{C183D7F6-B498-43B3-948B-1728B52AA6E4}">
+                <adec:decorative xmlns:adec="http://schemas.microsoft.com/office/drawing/2017/decorative" val="1"/>
+              </a:ext>
+            </a:extLst>
+          </p:cNvPr>
           <p:cNvSpPr/>
           <p:nvPr/>
         </p:nvSpPr>
@@ -9827,7 +10503,13 @@
       </p:sp>
       <p:sp>
         <p:nvSpPr>
-          <p:cNvPr id="19" name="Icon FaClipboardCheck"/>
+          <p:cNvPr id="19" name="Icon FaClipboardCheck">
+            <a:extLst>
+              <a:ext uri="{C183D7F6-B498-43B3-948B-1728B52AA6E4}">
+                <adec:decorative xmlns:adec="http://schemas.microsoft.com/office/drawing/2017/decorative" val="1"/>
+              </a:ext>
+            </a:extLst>
+          </p:cNvPr>
           <p:cNvSpPr/>
           <p:nvPr/>
         </p:nvSpPr>
@@ -9852,7 +10534,13 @@
       </p:sp>
       <p:pic>
         <p:nvPicPr>
-          <p:cNvPr id="20" name="Image 0" descr="C:\Users\whale\git\mwb-b04\presentations\_build\icons\FaClipboardCheck.png"/>
+          <p:cNvPr id="20" name="Image 0">
+            <a:extLst>
+              <a:ext uri="{C183D7F6-B498-43B3-948B-1728B52AA6E4}">
+                <adec:decorative xmlns:adec="http://schemas.microsoft.com/office/drawing/2017/decorative" val="1"/>
+              </a:ext>
+            </a:extLst>
+          </p:cNvPr>
           <p:cNvPicPr>
             <a:picLocks noChangeAspect="1"/>
           </p:cNvPicPr>
@@ -10001,11 +10689,11 @@
       </p:sp>
       <p:pic>
         <p:nvPicPr>
-          <p:cNvPr id="23" name="Narration">
+          <p:cNvPr id="23" name="Narration" descr="Narration for this slide; captions available">
             <a:hlinkClick r:id="" action="ppaction://media"/>
             <a:extLst>
               <a:ext uri="{FF2B5EF4-FFF2-40B4-BE49-F238E27FC236}">
-                <a16:creationId xmlns:a16="http://schemas.microsoft.com/office/drawing/2014/main" id="{4B9C3DB1-A3DB-DD68-0BDD-13DAC4EDFFBC}"/>
+                <a16:creationId xmlns:a16="http://schemas.microsoft.com/office/drawing/2014/main" id="{78F41947-DED7-4A46-BCEB-5C0CE29CDC59}"/>
               </a:ext>
             </a:extLst>
           </p:cNvPr>
@@ -10016,7 +10704,17 @@
             <a:audioFile r:link="rId2"/>
             <p:extLst>
               <p:ext uri="{DAA4B4D4-6D71-4841-9C94-3DE7FCFB9230}">
-                <p14:media xmlns:p14="http://schemas.microsoft.com/office/powerpoint/2010/main" r:embed="rId1"/>
+                <p14:media xmlns:p14="http://schemas.microsoft.com/office/powerpoint/2010/main" r:embed="rId1">
+                  <p14:extLst>
+                    <p:ext uri="{3AFAAA56-56D3-431D-BCD4-E75A35582382}">
+                      <p173:tracksInfo xmlns:p173="http://schemas.microsoft.com/office/powerpoint/2017/3/main" displayLoc="slide">
+                        <p173:trackLst>
+                          <p173:track id="{08F0A490-CD90-4F70-A538-3784CC0AEBEF}" label="English (captions)" lang="en-US" r:embed="rId7"/>
+                        </p173:trackLst>
+                      </p173:tracksInfo>
+                    </p:ext>
+                  </p14:extLst>
+                </p14:media>
               </p:ext>
             </p:extLst>
           </p:nvPr>
@@ -10183,7 +10881,13 @@
       </p:sp>
       <p:sp>
         <p:nvSpPr>
-          <p:cNvPr id="3" name="Tag How"/>
+          <p:cNvPr id="3" name="Tag How">
+            <a:extLst>
+              <a:ext uri="{C183D7F6-B498-43B3-948B-1728B52AA6E4}">
+                <adec:decorative xmlns:adec="http://schemas.microsoft.com/office/drawing/2017/decorative" val="1"/>
+              </a:ext>
+            </a:extLst>
+          </p:cNvPr>
           <p:cNvSpPr/>
           <p:nvPr/>
         </p:nvSpPr>
@@ -10246,7 +10950,13 @@
       </p:sp>
       <p:sp>
         <p:nvSpPr>
-          <p:cNvPr id="5" name="Gov 0"/>
+          <p:cNvPr id="5" name="Gov 0">
+            <a:extLst>
+              <a:ext uri="{C183D7F6-B498-43B3-948B-1728B52AA6E4}">
+                <adec:decorative xmlns:adec="http://schemas.microsoft.com/office/drawing/2017/decorative" val="1"/>
+              </a:ext>
+            </a:extLst>
+          </p:cNvPr>
           <p:cNvSpPr/>
           <p:nvPr/>
         </p:nvSpPr>
@@ -10280,7 +10990,13 @@
       </p:sp>
       <p:sp>
         <p:nvSpPr>
-          <p:cNvPr id="6" name="Icon FaListCheck"/>
+          <p:cNvPr id="6" name="Icon FaListCheck">
+            <a:extLst>
+              <a:ext uri="{C183D7F6-B498-43B3-948B-1728B52AA6E4}">
+                <adec:decorative xmlns:adec="http://schemas.microsoft.com/office/drawing/2017/decorative" val="1"/>
+              </a:ext>
+            </a:extLst>
+          </p:cNvPr>
           <p:cNvSpPr/>
           <p:nvPr/>
         </p:nvSpPr>
@@ -10305,7 +11021,13 @@
       </p:sp>
       <p:pic>
         <p:nvPicPr>
-          <p:cNvPr id="7" name="Image 0" descr="C:\Users\whale\git\mwb-b04\presentations\_build\icons\FaListCheck.png"/>
+          <p:cNvPr id="7" name="Image 0">
+            <a:extLst>
+              <a:ext uri="{C183D7F6-B498-43B3-948B-1728B52AA6E4}">
+                <adec:decorative xmlns:adec="http://schemas.microsoft.com/office/drawing/2017/decorative" val="1"/>
+              </a:ext>
+            </a:extLst>
+          </p:cNvPr>
           <p:cNvPicPr>
             <a:picLocks noChangeAspect="1"/>
           </p:cNvPicPr>
@@ -10462,7 +11184,13 @@
       </p:sp>
       <p:sp>
         <p:nvSpPr>
-          <p:cNvPr id="10" name="Gov 1"/>
+          <p:cNvPr id="10" name="Gov 1">
+            <a:extLst>
+              <a:ext uri="{C183D7F6-B498-43B3-948B-1728B52AA6E4}">
+                <adec:decorative xmlns:adec="http://schemas.microsoft.com/office/drawing/2017/decorative" val="1"/>
+              </a:ext>
+            </a:extLst>
+          </p:cNvPr>
           <p:cNvSpPr/>
           <p:nvPr/>
         </p:nvSpPr>
@@ -10496,7 +11224,13 @@
       </p:sp>
       <p:sp>
         <p:nvSpPr>
-          <p:cNvPr id="11" name="Icon FaCodeBranch"/>
+          <p:cNvPr id="11" name="Icon FaCodeBranch">
+            <a:extLst>
+              <a:ext uri="{C183D7F6-B498-43B3-948B-1728B52AA6E4}">
+                <adec:decorative xmlns:adec="http://schemas.microsoft.com/office/drawing/2017/decorative" val="1"/>
+              </a:ext>
+            </a:extLst>
+          </p:cNvPr>
           <p:cNvSpPr/>
           <p:nvPr/>
         </p:nvSpPr>
@@ -10521,7 +11255,13 @@
       </p:sp>
       <p:pic>
         <p:nvPicPr>
-          <p:cNvPr id="12" name="Image 1" descr="C:\Users\whale\git\mwb-b04\presentations\_build\icons\FaCodeBranch.png"/>
+          <p:cNvPr id="12" name="Image 1">
+            <a:extLst>
+              <a:ext uri="{C183D7F6-B498-43B3-948B-1728B52AA6E4}">
+                <adec:decorative xmlns:adec="http://schemas.microsoft.com/office/drawing/2017/decorative" val="1"/>
+              </a:ext>
+            </a:extLst>
+          </p:cNvPr>
           <p:cNvPicPr>
             <a:picLocks noChangeAspect="1"/>
           </p:cNvPicPr>
@@ -10678,7 +11418,13 @@
       </p:sp>
       <p:sp>
         <p:nvSpPr>
-          <p:cNvPr id="15" name="Gov 2"/>
+          <p:cNvPr id="15" name="Gov 2">
+            <a:extLst>
+              <a:ext uri="{C183D7F6-B498-43B3-948B-1728B52AA6E4}">
+                <adec:decorative xmlns:adec="http://schemas.microsoft.com/office/drawing/2017/decorative" val="1"/>
+              </a:ext>
+            </a:extLst>
+          </p:cNvPr>
           <p:cNvSpPr/>
           <p:nvPr/>
         </p:nvSpPr>
@@ -10712,7 +11458,13 @@
       </p:sp>
       <p:sp>
         <p:nvSpPr>
-          <p:cNvPr id="16" name="Icon FaFileShield"/>
+          <p:cNvPr id="16" name="Icon FaFileShield">
+            <a:extLst>
+              <a:ext uri="{C183D7F6-B498-43B3-948B-1728B52AA6E4}">
+                <adec:decorative xmlns:adec="http://schemas.microsoft.com/office/drawing/2017/decorative" val="1"/>
+              </a:ext>
+            </a:extLst>
+          </p:cNvPr>
           <p:cNvSpPr/>
           <p:nvPr/>
         </p:nvSpPr>
@@ -10737,7 +11489,13 @@
       </p:sp>
       <p:pic>
         <p:nvPicPr>
-          <p:cNvPr id="17" name="Image 2" descr="C:\Users\whale\git\mwb-b04\presentations\_build\icons\FaFileShield.png"/>
+          <p:cNvPr id="17" name="Image 2">
+            <a:extLst>
+              <a:ext uri="{C183D7F6-B498-43B3-948B-1728B52AA6E4}">
+                <adec:decorative xmlns:adec="http://schemas.microsoft.com/office/drawing/2017/decorative" val="1"/>
+              </a:ext>
+            </a:extLst>
+          </p:cNvPr>
           <p:cNvPicPr>
             <a:picLocks noChangeAspect="1"/>
           </p:cNvPicPr>
@@ -10876,7 +11634,13 @@
       </p:sp>
       <p:sp>
         <p:nvSpPr>
-          <p:cNvPr id="20" name="Gap"/>
+          <p:cNvPr id="20" name="Gap">
+            <a:extLst>
+              <a:ext uri="{C183D7F6-B498-43B3-948B-1728B52AA6E4}">
+                <adec:decorative xmlns:adec="http://schemas.microsoft.com/office/drawing/2017/decorative" val="1"/>
+              </a:ext>
+            </a:extLst>
+          </p:cNvPr>
           <p:cNvSpPr/>
           <p:nvPr/>
         </p:nvSpPr>
@@ -10910,7 +11674,13 @@
       </p:sp>
       <p:sp>
         <p:nvSpPr>
-          <p:cNvPr id="21" name="Icon FaTriangleExclamation"/>
+          <p:cNvPr id="21" name="Icon FaTriangleExclamation">
+            <a:extLst>
+              <a:ext uri="{C183D7F6-B498-43B3-948B-1728B52AA6E4}">
+                <adec:decorative xmlns:adec="http://schemas.microsoft.com/office/drawing/2017/decorative" val="1"/>
+              </a:ext>
+            </a:extLst>
+          </p:cNvPr>
           <p:cNvSpPr/>
           <p:nvPr/>
         </p:nvSpPr>
@@ -10935,7 +11705,13 @@
       </p:sp>
       <p:pic>
         <p:nvPicPr>
-          <p:cNvPr id="22" name="Image 3" descr="C:\Users\whale\git\mwb-b04\presentations\_build\icons\FaTriangleExclamation.png"/>
+          <p:cNvPr id="22" name="Image 3">
+            <a:extLst>
+              <a:ext uri="{C183D7F6-B498-43B3-948B-1728B52AA6E4}">
+                <adec:decorative xmlns:adec="http://schemas.microsoft.com/office/drawing/2017/decorative" val="1"/>
+              </a:ext>
+            </a:extLst>
+          </p:cNvPr>
           <p:cNvPicPr>
             <a:picLocks noChangeAspect="1"/>
           </p:cNvPicPr>
@@ -11084,11 +11860,11 @@
       </p:sp>
       <p:pic>
         <p:nvPicPr>
-          <p:cNvPr id="26" name="Narration">
+          <p:cNvPr id="26" name="Narration" descr="Narration for this slide; captions available">
             <a:hlinkClick r:id="" action="ppaction://media"/>
             <a:extLst>
               <a:ext uri="{FF2B5EF4-FFF2-40B4-BE49-F238E27FC236}">
-                <a16:creationId xmlns:a16="http://schemas.microsoft.com/office/drawing/2014/main" id="{EEF1F294-59BF-65F5-76A3-C4C28448C30C}"/>
+                <a16:creationId xmlns:a16="http://schemas.microsoft.com/office/drawing/2014/main" id="{8E31658C-F027-6F45-C7E3-0FE751BE25F2}"/>
               </a:ext>
             </a:extLst>
           </p:cNvPr>
@@ -11099,7 +11875,17 @@
             <a:audioFile r:link="rId2"/>
             <p:extLst>
               <p:ext uri="{DAA4B4D4-6D71-4841-9C94-3DE7FCFB9230}">
-                <p14:media xmlns:p14="http://schemas.microsoft.com/office/powerpoint/2010/main" r:embed="rId1"/>
+                <p14:media xmlns:p14="http://schemas.microsoft.com/office/powerpoint/2010/main" r:embed="rId1">
+                  <p14:extLst>
+                    <p:ext uri="{3AFAAA56-56D3-431D-BCD4-E75A35582382}">
+                      <p173:tracksInfo xmlns:p173="http://schemas.microsoft.com/office/powerpoint/2017/3/main" displayLoc="slide">
+                        <p173:trackLst>
+                          <p173:track id="{818AF9F0-32B8-4F14-A35E-82FE12813B47}" label="English (captions)" lang="en-US" r:embed="rId10"/>
+                        </p173:trackLst>
+                      </p173:tracksInfo>
+                    </p:ext>
+                  </p14:extLst>
+                </p14:media>
               </p:ext>
             </p:extLst>
           </p:nvPr>
@@ -11205,9 +11991,9 @@
 </file>
 
 <file path=ppt/theme/theme1.xml><?xml version="1.0" encoding="utf-8"?>
-<a:theme xmlns:a="http://schemas.openxmlformats.org/drawingml/2006/main" name="Modernization Workbook">
+<a:theme xmlns:a="http://schemas.openxmlformats.org/drawingml/2006/main" name="Federal Modernization Workbook">
   <a:themeElements>
-    <a:clrScheme name="Modernization Workbook">
+    <a:clrScheme name="Federal Modernization Workbook">
       <a:dk1>
         <a:srgbClr val="1F2A44"/>
       </a:dk1>
@@ -11245,7 +12031,7 @@
         <a:srgbClr val="334155"/>
       </a:folHlink>
     </a:clrScheme>
-    <a:fontScheme name="Modernization Workbook">
+    <a:fontScheme name="Federal Modernization Workbook">
       <a:majorFont>
         <a:latin typeface="Cambria"/>
         <a:ea typeface=""/>

--- a/presentations/b04-access/B04_Access_Narrated.pptx
+++ b/presentations/b04-access/B04_Access_Narrated.pptx
@@ -179,7 +179,7 @@
     </p:spTree>
     <p:extLst>
       <p:ext uri="{BB962C8B-B14F-4D97-AF65-F5344CB8AC3E}">
-        <p14:creationId xmlns:p14="http://schemas.microsoft.com/office/powerpoint/2010/main" val="3304339711"/>
+        <p14:creationId xmlns:p14="http://schemas.microsoft.com/office/powerpoint/2010/main" val="3762210520"/>
       </p:ext>
     </p:extLst>
   </p:cSld>
@@ -2160,7 +2160,7 @@
             <a:hlinkClick r:id="" action="ppaction://media"/>
             <a:extLst>
               <a:ext uri="{FF2B5EF4-FFF2-40B4-BE49-F238E27FC236}">
-                <a16:creationId xmlns:a16="http://schemas.microsoft.com/office/drawing/2014/main" id="{15BC8509-896A-60F2-877D-A21D26AAF489}"/>
+                <a16:creationId xmlns:a16="http://schemas.microsoft.com/office/drawing/2014/main" id="{29978967-C1BC-649F-4F18-1B97C0CD1647}"/>
               </a:ext>
             </a:extLst>
           </p:cNvPr>
@@ -2176,7 +2176,7 @@
                     <p:ext uri="{3AFAAA56-56D3-431D-BCD4-E75A35582382}">
                       <p173:tracksInfo xmlns:p173="http://schemas.microsoft.com/office/powerpoint/2017/3/main" displayLoc="slide">
                         <p173:trackLst>
-                          <p173:track id="{67C9D76B-B9E1-42B0-A0E1-84F4D36DAB4B}" label="English (captions)" lang="en-US" r:embed="rId6"/>
+                          <p173:track id="{8DFB9ABA-3895-41C6-9A8B-ACA7641542D1}" label="English (captions)" lang="en-US" r:embed="rId6"/>
                         </p173:trackLst>
                       </p173:tracksInfo>
                     </p:ext>
@@ -3227,7 +3227,7 @@
             <a:hlinkClick r:id="" action="ppaction://media"/>
             <a:extLst>
               <a:ext uri="{FF2B5EF4-FFF2-40B4-BE49-F238E27FC236}">
-                <a16:creationId xmlns:a16="http://schemas.microsoft.com/office/drawing/2014/main" id="{2F2653B4-653F-96E9-674C-1611C418BEC4}"/>
+                <a16:creationId xmlns:a16="http://schemas.microsoft.com/office/drawing/2014/main" id="{948EEFB8-2384-9BC7-0EFB-80E781A2B118}"/>
               </a:ext>
             </a:extLst>
           </p:cNvPr>
@@ -3243,7 +3243,7 @@
                     <p:ext uri="{3AFAAA56-56D3-431D-BCD4-E75A35582382}">
                       <p173:tracksInfo xmlns:p173="http://schemas.microsoft.com/office/powerpoint/2017/3/main" displayLoc="slide">
                         <p173:trackLst>
-                          <p173:track id="{EC120358-AE27-4679-BDF8-9C951146005B}" label="English (captions)" lang="en-US" r:embed="rId11"/>
+                          <p173:track id="{B700F5EE-C3FC-4B07-A011-AAAF3152E28C}" label="English (captions)" lang="en-US" r:embed="rId11"/>
                         </p173:trackLst>
                       </p173:tracksInfo>
                     </p:ext>
@@ -3276,10 +3276,10 @@
   </p:clrMapOvr>
   <mc:AlternateContent xmlns:mc="http://schemas.openxmlformats.org/markup-compatibility/2006">
     <mc:Choice xmlns:p14="http://schemas.microsoft.com/office/powerpoint/2010/main" Requires="p14">
-      <p:transition spd="slow" p14:dur="2000" advTm="55740"/>
+      <p:transition spd="slow" p14:dur="2000" advTm="57900"/>
     </mc:Choice>
     <mc:Fallback>
-      <p:transition spd="slow" advTm="55740"/>
+      <p:transition spd="slow" advTm="57900"/>
     </mc:Fallback>
   </mc:AlternateContent>
   <p:timing>
@@ -3313,7 +3313,7 @@
                                   <p:childTnLst>
                                     <p:cmd type="call" cmd="playFrom(0.0)">
                                       <p:cBhvr>
-                                        <p:cTn id="6" dur="54744" fill="hold"/>
+                                        <p:cTn id="6" dur="56904" fill="hold"/>
                                         <p:tgtEl>
                                           <p:spTgt spid="26"/>
                                         </p:tgtEl>
@@ -4277,7 +4277,7 @@
             <a:hlinkClick r:id="" action="ppaction://media"/>
             <a:extLst>
               <a:ext uri="{FF2B5EF4-FFF2-40B4-BE49-F238E27FC236}">
-                <a16:creationId xmlns:a16="http://schemas.microsoft.com/office/drawing/2014/main" id="{A4D5FF8D-9D1B-6492-7F81-55B7C19928DC}"/>
+                <a16:creationId xmlns:a16="http://schemas.microsoft.com/office/drawing/2014/main" id="{33FA4394-5364-880A-4A53-E2B0F37654A6}"/>
               </a:ext>
             </a:extLst>
           </p:cNvPr>
@@ -4293,7 +4293,7 @@
                     <p:ext uri="{3AFAAA56-56D3-431D-BCD4-E75A35582382}">
                       <p173:tracksInfo xmlns:p173="http://schemas.microsoft.com/office/powerpoint/2017/3/main" displayLoc="slide">
                         <p173:trackLst>
-                          <p173:track id="{AD3FF930-2A87-4455-BC13-FC81B10C0BEA}" label="English (captions)" lang="en-US" r:embed="rId11"/>
+                          <p173:track id="{49EFBBD2-F2B8-43AE-B681-A58F5A8B9088}" label="English (captions)" lang="en-US" r:embed="rId11"/>
                         </p173:trackLst>
                       </p173:tracksInfo>
                     </p:ext>
@@ -4326,10 +4326,10 @@
   </p:clrMapOvr>
   <mc:AlternateContent xmlns:mc="http://schemas.openxmlformats.org/markup-compatibility/2006">
     <mc:Choice xmlns:p14="http://schemas.microsoft.com/office/powerpoint/2010/main" Requires="p14">
-      <p:transition spd="slow" p14:dur="2000" advTm="67190"/>
+      <p:transition spd="slow" p14:dur="2000" advTm="69060"/>
     </mc:Choice>
     <mc:Fallback>
-      <p:transition spd="slow" advTm="67190"/>
+      <p:transition spd="slow" advTm="69060"/>
     </mc:Fallback>
   </mc:AlternateContent>
   <p:timing>
@@ -4363,7 +4363,7 @@
                                   <p:childTnLst>
                                     <p:cmd type="call" cmd="playFrom(0.0)">
                                       <p:cBhvr>
-                                        <p:cTn id="6" dur="66192" fill="hold"/>
+                                        <p:cTn id="6" dur="68064" fill="hold"/>
                                         <p:tgtEl>
                                           <p:spTgt spid="24"/>
                                         </p:tgtEl>
@@ -5250,7 +5250,7 @@
             <a:hlinkClick r:id="" action="ppaction://media"/>
             <a:extLst>
               <a:ext uri="{FF2B5EF4-FFF2-40B4-BE49-F238E27FC236}">
-                <a16:creationId xmlns:a16="http://schemas.microsoft.com/office/drawing/2014/main" id="{6B89FE61-4E13-AC56-E7A8-0A65EE084EAE}"/>
+                <a16:creationId xmlns:a16="http://schemas.microsoft.com/office/drawing/2014/main" id="{1E1AD309-4893-7229-546C-A4B9751B1960}"/>
               </a:ext>
             </a:extLst>
           </p:cNvPr>
@@ -5266,7 +5266,7 @@
                     <p:ext uri="{3AFAAA56-56D3-431D-BCD4-E75A35582382}">
                       <p173:tracksInfo xmlns:p173="http://schemas.microsoft.com/office/powerpoint/2017/3/main" displayLoc="slide">
                         <p173:trackLst>
-                          <p173:track id="{AC5309E9-8E66-453A-88C2-B708347F2C57}" label="English (captions)" lang="en-US" r:embed="rId8"/>
+                          <p173:track id="{C1BFF37A-4D6D-44E2-86C4-A402C0DC1D29}" label="English (captions)" lang="en-US" r:embed="rId8"/>
                         </p173:trackLst>
                       </p173:tracksInfo>
                     </p:ext>
@@ -6209,7 +6209,7 @@
             <a:hlinkClick r:id="" action="ppaction://media"/>
             <a:extLst>
               <a:ext uri="{FF2B5EF4-FFF2-40B4-BE49-F238E27FC236}">
-                <a16:creationId xmlns:a16="http://schemas.microsoft.com/office/drawing/2014/main" id="{EACD625D-8FC6-BF63-5DFF-BD0C25883E24}"/>
+                <a16:creationId xmlns:a16="http://schemas.microsoft.com/office/drawing/2014/main" id="{EC330C2D-D39A-F957-DB8A-D571DCF15CBE}"/>
               </a:ext>
             </a:extLst>
           </p:cNvPr>
@@ -6225,7 +6225,7 @@
                     <p:ext uri="{3AFAAA56-56D3-431D-BCD4-E75A35582382}">
                       <p173:tracksInfo xmlns:p173="http://schemas.microsoft.com/office/powerpoint/2017/3/main" displayLoc="slide">
                         <p173:trackLst>
-                          <p173:track id="{DE923868-DD21-4E99-83C8-B73E87D6350D}" label="English (captions)" lang="en-US" r:embed="rId7"/>
+                          <p173:track id="{10738A23-8323-43C4-A7AE-878CB9143118}" label="English (captions)" lang="en-US" r:embed="rId7"/>
                         </p173:trackLst>
                       </p173:tracksInfo>
                     </p:ext>
@@ -7164,7 +7164,7 @@
             <a:hlinkClick r:id="" action="ppaction://media"/>
             <a:extLst>
               <a:ext uri="{FF2B5EF4-FFF2-40B4-BE49-F238E27FC236}">
-                <a16:creationId xmlns:a16="http://schemas.microsoft.com/office/drawing/2014/main" id="{EB16083A-B9A2-1A67-09F5-5F4F66E7CBB6}"/>
+                <a16:creationId xmlns:a16="http://schemas.microsoft.com/office/drawing/2014/main" id="{0585BA1C-91DB-12E6-1A66-F9AA636281DB}"/>
               </a:ext>
             </a:extLst>
           </p:cNvPr>
@@ -7180,7 +7180,7 @@
                     <p:ext uri="{3AFAAA56-56D3-431D-BCD4-E75A35582382}">
                       <p173:tracksInfo xmlns:p173="http://schemas.microsoft.com/office/powerpoint/2017/3/main" displayLoc="slide">
                         <p173:trackLst>
-                          <p173:track id="{9D4B7C87-1B1B-4300-A2F2-28845576B5DF}" label="English (captions)" lang="en-US" r:embed="rId9"/>
+                          <p173:track id="{64F42161-84EF-445C-93BE-E9D9A10B2977}" label="English (captions)" lang="en-US" r:embed="rId9"/>
                         </p173:trackLst>
                       </p173:tracksInfo>
                     </p:ext>
@@ -8443,7 +8443,7 @@
             <a:hlinkClick r:id="" action="ppaction://media"/>
             <a:extLst>
               <a:ext uri="{FF2B5EF4-FFF2-40B4-BE49-F238E27FC236}">
-                <a16:creationId xmlns:a16="http://schemas.microsoft.com/office/drawing/2014/main" id="{3A1E7BD8-4337-EF36-7E96-2E69FCD7C1DD}"/>
+                <a16:creationId xmlns:a16="http://schemas.microsoft.com/office/drawing/2014/main" id="{4CEF7CB8-A3D8-A883-9D26-9E87CB90500B}"/>
               </a:ext>
             </a:extLst>
           </p:cNvPr>
@@ -8459,7 +8459,7 @@
                     <p:ext uri="{3AFAAA56-56D3-431D-BCD4-E75A35582382}">
                       <p173:tracksInfo xmlns:p173="http://schemas.microsoft.com/office/powerpoint/2017/3/main" displayLoc="slide">
                         <p173:trackLst>
-                          <p173:track id="{09CA3012-7339-490C-8A65-A68B5C13102D}" label="English (captions)" lang="en-US" r:embed="rId10"/>
+                          <p173:track id="{633FE210-0C48-47DA-B06D-F3C239BFB6BA}" label="English (captions)" lang="en-US" r:embed="rId10"/>
                         </p173:trackLst>
                       </p173:tracksInfo>
                     </p:ext>
@@ -9554,7 +9554,7 @@
             <a:hlinkClick r:id="" action="ppaction://media"/>
             <a:extLst>
               <a:ext uri="{FF2B5EF4-FFF2-40B4-BE49-F238E27FC236}">
-                <a16:creationId xmlns:a16="http://schemas.microsoft.com/office/drawing/2014/main" id="{0BB8CE59-0C00-900B-C962-9C9982053CB6}"/>
+                <a16:creationId xmlns:a16="http://schemas.microsoft.com/office/drawing/2014/main" id="{B870F264-3884-6943-B504-00FCB821A5BE}"/>
               </a:ext>
             </a:extLst>
           </p:cNvPr>
@@ -9570,7 +9570,7 @@
                     <p:ext uri="{3AFAAA56-56D3-431D-BCD4-E75A35582382}">
                       <p173:tracksInfo xmlns:p173="http://schemas.microsoft.com/office/powerpoint/2017/3/main" displayLoc="slide">
                         <p173:trackLst>
-                          <p173:track id="{7AA457CD-7774-4906-A9C2-AC6E77198DBA}" label="English (captions)" lang="en-US" r:embed="rId7"/>
+                          <p173:track id="{81C9BAE0-F517-4C4E-B622-FB20CEDB45F3}" label="English (captions)" lang="en-US" r:embed="rId7"/>
                         </p173:trackLst>
                       </p173:tracksInfo>
                     </p:ext>
@@ -9603,10 +9603,10 @@
   </p:clrMapOvr>
   <mc:AlternateContent xmlns:mc="http://schemas.openxmlformats.org/markup-compatibility/2006">
     <mc:Choice xmlns:p14="http://schemas.microsoft.com/office/powerpoint/2010/main" Requires="p14">
-      <p:transition spd="slow" p14:dur="2000" advTm="73530"/>
+      <p:transition spd="slow" p14:dur="2000" advTm="75210"/>
     </mc:Choice>
     <mc:Fallback>
-      <p:transition spd="slow" advTm="73530"/>
+      <p:transition spd="slow" advTm="75210"/>
     </mc:Fallback>
   </mc:AlternateContent>
   <p:timing>
@@ -9640,7 +9640,7 @@
                                   <p:childTnLst>
                                     <p:cmd type="call" cmd="playFrom(0.0)">
                                       <p:cBhvr>
-                                        <p:cTn id="6" dur="72528" fill="hold"/>
+                                        <p:cTn id="6" dur="74208" fill="hold"/>
                                         <p:tgtEl>
                                           <p:spTgt spid="21"/>
                                         </p:tgtEl>
@@ -10693,7 +10693,7 @@
             <a:hlinkClick r:id="" action="ppaction://media"/>
             <a:extLst>
               <a:ext uri="{FF2B5EF4-FFF2-40B4-BE49-F238E27FC236}">
-                <a16:creationId xmlns:a16="http://schemas.microsoft.com/office/drawing/2014/main" id="{78F41947-DED7-4A46-BCEB-5C0CE29CDC59}"/>
+                <a16:creationId xmlns:a16="http://schemas.microsoft.com/office/drawing/2014/main" id="{89066D06-788F-0671-BFCE-CDEF1A443FD4}"/>
               </a:ext>
             </a:extLst>
           </p:cNvPr>
@@ -10709,7 +10709,7 @@
                     <p:ext uri="{3AFAAA56-56D3-431D-BCD4-E75A35582382}">
                       <p173:tracksInfo xmlns:p173="http://schemas.microsoft.com/office/powerpoint/2017/3/main" displayLoc="slide">
                         <p173:trackLst>
-                          <p173:track id="{08F0A490-CD90-4F70-A538-3784CC0AEBEF}" label="English (captions)" lang="en-US" r:embed="rId7"/>
+                          <p173:track id="{DFCA6D27-9EEB-4237-BE3C-AB18687CE718}" label="English (captions)" lang="en-US" r:embed="rId7"/>
                         </p173:trackLst>
                       </p173:tracksInfo>
                     </p:ext>
@@ -10742,10 +10742,10 @@
   </p:clrMapOvr>
   <mc:AlternateContent xmlns:mc="http://schemas.openxmlformats.org/markup-compatibility/2006">
     <mc:Choice xmlns:p14="http://schemas.microsoft.com/office/powerpoint/2010/main" Requires="p14">
-      <p:transition spd="slow" p14:dur="2000" advTm="72810"/>
+      <p:transition spd="slow" p14:dur="2000" advTm="74750"/>
     </mc:Choice>
     <mc:Fallback>
-      <p:transition spd="slow" advTm="72810"/>
+      <p:transition spd="slow" advTm="74750"/>
     </mc:Fallback>
   </mc:AlternateContent>
   <p:timing>
@@ -10779,7 +10779,7 @@
                                   <p:childTnLst>
                                     <p:cmd type="call" cmd="playFrom(0.0)">
                                       <p:cBhvr>
-                                        <p:cTn id="6" dur="71808" fill="hold"/>
+                                        <p:cTn id="6" dur="73752" fill="hold"/>
                                         <p:tgtEl>
                                           <p:spTgt spid="23"/>
                                         </p:tgtEl>
@@ -11864,7 +11864,7 @@
             <a:hlinkClick r:id="" action="ppaction://media"/>
             <a:extLst>
               <a:ext uri="{FF2B5EF4-FFF2-40B4-BE49-F238E27FC236}">
-                <a16:creationId xmlns:a16="http://schemas.microsoft.com/office/drawing/2014/main" id="{8E31658C-F027-6F45-C7E3-0FE751BE25F2}"/>
+                <a16:creationId xmlns:a16="http://schemas.microsoft.com/office/drawing/2014/main" id="{782B598D-A4F6-0D2C-782B-FB3EA4B65DEE}"/>
               </a:ext>
             </a:extLst>
           </p:cNvPr>
@@ -11880,7 +11880,7 @@
                     <p:ext uri="{3AFAAA56-56D3-431D-BCD4-E75A35582382}">
                       <p173:tracksInfo xmlns:p173="http://schemas.microsoft.com/office/powerpoint/2017/3/main" displayLoc="slide">
                         <p173:trackLst>
-                          <p173:track id="{818AF9F0-32B8-4F14-A35E-82FE12813B47}" label="English (captions)" lang="en-US" r:embed="rId10"/>
+                          <p173:track id="{C89B0800-5DBE-4DF1-8C4B-3313F7B51516}" label="English (captions)" lang="en-US" r:embed="rId10"/>
                         </p173:trackLst>
                       </p173:tracksInfo>
                     </p:ext>

--- a/presentations/b04-access/B04_Access_Narrated.pptx
+++ b/presentations/b04-access/B04_Access_Narrated.pptx
@@ -179,7 +179,7 @@
     </p:spTree>
     <p:extLst>
       <p:ext uri="{BB962C8B-B14F-4D97-AF65-F5344CB8AC3E}">
-        <p14:creationId xmlns:p14="http://schemas.microsoft.com/office/powerpoint/2010/main" val="3762210520"/>
+        <p14:creationId xmlns:p14="http://schemas.microsoft.com/office/powerpoint/2010/main" val="1987151859"/>
       </p:ext>
     </p:extLst>
   </p:cSld>
@@ -2160,7 +2160,7 @@
             <a:hlinkClick r:id="" action="ppaction://media"/>
             <a:extLst>
               <a:ext uri="{FF2B5EF4-FFF2-40B4-BE49-F238E27FC236}">
-                <a16:creationId xmlns:a16="http://schemas.microsoft.com/office/drawing/2014/main" id="{29978967-C1BC-649F-4F18-1B97C0CD1647}"/>
+                <a16:creationId xmlns:a16="http://schemas.microsoft.com/office/drawing/2014/main" id="{1D21B2F9-B41F-E626-0C93-832A76D07B35}"/>
               </a:ext>
             </a:extLst>
           </p:cNvPr>
@@ -2176,7 +2176,7 @@
                     <p:ext uri="{3AFAAA56-56D3-431D-BCD4-E75A35582382}">
                       <p173:tracksInfo xmlns:p173="http://schemas.microsoft.com/office/powerpoint/2017/3/main" displayLoc="slide">
                         <p173:trackLst>
-                          <p173:track id="{8DFB9ABA-3895-41C6-9A8B-ACA7641542D1}" label="English (captions)" lang="en-US" r:embed="rId6"/>
+                          <p173:track id="{81C9EB63-A181-44F5-86B5-6BAACCC3D160}" label="English (captions)" lang="en-US" r:embed="rId6"/>
                         </p173:trackLst>
                       </p173:tracksInfo>
                     </p:ext>
@@ -2209,10 +2209,10 @@
   </p:clrMapOvr>
   <mc:AlternateContent xmlns:mc="http://schemas.openxmlformats.org/markup-compatibility/2006">
     <mc:Choice xmlns:p14="http://schemas.microsoft.com/office/powerpoint/2010/main" Requires="p14">
-      <p:transition spd="slow" p14:dur="2000" advTm="35320"/>
+      <p:transition spd="slow" p14:dur="2000" advTm="41850"/>
     </mc:Choice>
     <mc:Fallback>
-      <p:transition spd="slow" advTm="35320"/>
+      <p:transition spd="slow" advTm="41850"/>
     </mc:Fallback>
   </mc:AlternateContent>
   <p:timing>
@@ -2246,7 +2246,7 @@
                                   <p:childTnLst>
                                     <p:cmd type="call" cmd="playFrom(0.0)">
                                       <p:cBhvr>
-                                        <p:cTn id="6" dur="34320" fill="hold"/>
+                                        <p:cTn id="6" dur="37848" fill="hold"/>
                                         <p:tgtEl>
                                           <p:spTgt spid="8"/>
                                         </p:tgtEl>
@@ -3227,7 +3227,7 @@
             <a:hlinkClick r:id="" action="ppaction://media"/>
             <a:extLst>
               <a:ext uri="{FF2B5EF4-FFF2-40B4-BE49-F238E27FC236}">
-                <a16:creationId xmlns:a16="http://schemas.microsoft.com/office/drawing/2014/main" id="{948EEFB8-2384-9BC7-0EFB-80E781A2B118}"/>
+                <a16:creationId xmlns:a16="http://schemas.microsoft.com/office/drawing/2014/main" id="{2986E9DD-12D4-1ACD-89D3-399786A00B4F}"/>
               </a:ext>
             </a:extLst>
           </p:cNvPr>
@@ -3243,7 +3243,7 @@
                     <p:ext uri="{3AFAAA56-56D3-431D-BCD4-E75A35582382}">
                       <p173:tracksInfo xmlns:p173="http://schemas.microsoft.com/office/powerpoint/2017/3/main" displayLoc="slide">
                         <p173:trackLst>
-                          <p173:track id="{B700F5EE-C3FC-4B07-A011-AAAF3152E28C}" label="English (captions)" lang="en-US" r:embed="rId11"/>
+                          <p173:track id="{6CA7A81F-E9FA-45F6-B871-3B4975110D42}" label="English (captions)" lang="en-US" r:embed="rId11"/>
                         </p173:trackLst>
                       </p173:tracksInfo>
                     </p:ext>
@@ -3276,10 +3276,10 @@
   </p:clrMapOvr>
   <mc:AlternateContent xmlns:mc="http://schemas.openxmlformats.org/markup-compatibility/2006">
     <mc:Choice xmlns:p14="http://schemas.microsoft.com/office/powerpoint/2010/main" Requires="p14">
-      <p:transition spd="slow" p14:dur="2000" advTm="57900"/>
+      <p:transition spd="slow" p14:dur="2000" advTm="57690"/>
     </mc:Choice>
     <mc:Fallback>
-      <p:transition spd="slow" advTm="57900"/>
+      <p:transition spd="slow" advTm="57690"/>
     </mc:Fallback>
   </mc:AlternateContent>
   <p:timing>
@@ -3313,7 +3313,7 @@
                                   <p:childTnLst>
                                     <p:cmd type="call" cmd="playFrom(0.0)">
                                       <p:cBhvr>
-                                        <p:cTn id="6" dur="56904" fill="hold"/>
+                                        <p:cTn id="6" dur="53688" fill="hold"/>
                                         <p:tgtEl>
                                           <p:spTgt spid="26"/>
                                         </p:tgtEl>
@@ -4277,7 +4277,7 @@
             <a:hlinkClick r:id="" action="ppaction://media"/>
             <a:extLst>
               <a:ext uri="{FF2B5EF4-FFF2-40B4-BE49-F238E27FC236}">
-                <a16:creationId xmlns:a16="http://schemas.microsoft.com/office/drawing/2014/main" id="{33FA4394-5364-880A-4A53-E2B0F37654A6}"/>
+                <a16:creationId xmlns:a16="http://schemas.microsoft.com/office/drawing/2014/main" id="{BD3B5C13-E4C1-922B-7808-4160B36B3E30}"/>
               </a:ext>
             </a:extLst>
           </p:cNvPr>
@@ -4293,7 +4293,7 @@
                     <p:ext uri="{3AFAAA56-56D3-431D-BCD4-E75A35582382}">
                       <p173:tracksInfo xmlns:p173="http://schemas.microsoft.com/office/powerpoint/2017/3/main" displayLoc="slide">
                         <p173:trackLst>
-                          <p173:track id="{49EFBBD2-F2B8-43AE-B681-A58F5A8B9088}" label="English (captions)" lang="en-US" r:embed="rId11"/>
+                          <p173:track id="{46082A97-E9C1-4EFB-8E89-1D1DDD0D6A9B}" label="English (captions)" lang="en-US" r:embed="rId11"/>
                         </p173:trackLst>
                       </p173:tracksInfo>
                     </p:ext>
@@ -4326,10 +4326,10 @@
   </p:clrMapOvr>
   <mc:AlternateContent xmlns:mc="http://schemas.openxmlformats.org/markup-compatibility/2006">
     <mc:Choice xmlns:p14="http://schemas.microsoft.com/office/powerpoint/2010/main" Requires="p14">
-      <p:transition spd="slow" p14:dur="2000" advTm="69060"/>
+      <p:transition spd="slow" p14:dur="2000" advTm="61740"/>
     </mc:Choice>
     <mc:Fallback>
-      <p:transition spd="slow" advTm="69060"/>
+      <p:transition spd="slow" advTm="61740"/>
     </mc:Fallback>
   </mc:AlternateContent>
   <p:timing>
@@ -4363,7 +4363,7 @@
                                   <p:childTnLst>
                                     <p:cmd type="call" cmd="playFrom(0.0)">
                                       <p:cBhvr>
-                                        <p:cTn id="6" dur="68064" fill="hold"/>
+                                        <p:cTn id="6" dur="57744" fill="hold"/>
                                         <p:tgtEl>
                                           <p:spTgt spid="24"/>
                                         </p:tgtEl>
@@ -5250,7 +5250,7 @@
             <a:hlinkClick r:id="" action="ppaction://media"/>
             <a:extLst>
               <a:ext uri="{FF2B5EF4-FFF2-40B4-BE49-F238E27FC236}">
-                <a16:creationId xmlns:a16="http://schemas.microsoft.com/office/drawing/2014/main" id="{1E1AD309-4893-7229-546C-A4B9751B1960}"/>
+                <a16:creationId xmlns:a16="http://schemas.microsoft.com/office/drawing/2014/main" id="{54BA6603-E10F-C7DF-D9CC-68C1BF652ECD}"/>
               </a:ext>
             </a:extLst>
           </p:cNvPr>
@@ -5266,7 +5266,7 @@
                     <p:ext uri="{3AFAAA56-56D3-431D-BCD4-E75A35582382}">
                       <p173:tracksInfo xmlns:p173="http://schemas.microsoft.com/office/powerpoint/2017/3/main" displayLoc="slide">
                         <p173:trackLst>
-                          <p173:track id="{C1BFF37A-4D6D-44E2-86C4-A402C0DC1D29}" label="English (captions)" lang="en-US" r:embed="rId8"/>
+                          <p173:track id="{AFC008EC-4542-453D-8D26-7FFA918960B9}" label="English (captions)" lang="en-US" r:embed="rId8"/>
                         </p173:trackLst>
                       </p173:tracksInfo>
                     </p:ext>
@@ -5299,10 +5299,10 @@
   </p:clrMapOvr>
   <mc:AlternateContent xmlns:mc="http://schemas.openxmlformats.org/markup-compatibility/2006">
     <mc:Choice xmlns:p14="http://schemas.microsoft.com/office/powerpoint/2010/main" Requires="p14">
-      <p:transition spd="slow" p14:dur="2000" advTm="65180"/>
+      <p:transition spd="slow" p14:dur="2000" advTm="58290"/>
     </mc:Choice>
     <mc:Fallback>
-      <p:transition spd="slow" advTm="65180"/>
+      <p:transition spd="slow" advTm="58290"/>
     </mc:Fallback>
   </mc:AlternateContent>
   <p:timing>
@@ -5336,7 +5336,7 @@
                                   <p:childTnLst>
                                     <p:cmd type="call" cmd="playFrom(0.0)">
                                       <p:cBhvr>
-                                        <p:cTn id="6" dur="64176" fill="hold"/>
+                                        <p:cTn id="6" dur="54288" fill="hold"/>
                                         <p:tgtEl>
                                           <p:spTgt spid="21"/>
                                         </p:tgtEl>
@@ -6209,7 +6209,7 @@
             <a:hlinkClick r:id="" action="ppaction://media"/>
             <a:extLst>
               <a:ext uri="{FF2B5EF4-FFF2-40B4-BE49-F238E27FC236}">
-                <a16:creationId xmlns:a16="http://schemas.microsoft.com/office/drawing/2014/main" id="{EC330C2D-D39A-F957-DB8A-D571DCF15CBE}"/>
+                <a16:creationId xmlns:a16="http://schemas.microsoft.com/office/drawing/2014/main" id="{09613D6D-EA6B-506C-6F83-123716A91629}"/>
               </a:ext>
             </a:extLst>
           </p:cNvPr>
@@ -6225,7 +6225,7 @@
                     <p:ext uri="{3AFAAA56-56D3-431D-BCD4-E75A35582382}">
                       <p173:tracksInfo xmlns:p173="http://schemas.microsoft.com/office/powerpoint/2017/3/main" displayLoc="slide">
                         <p173:trackLst>
-                          <p173:track id="{10738A23-8323-43C4-A7AE-878CB9143118}" label="English (captions)" lang="en-US" r:embed="rId7"/>
+                          <p173:track id="{F095CD80-801C-4F05-A0A3-E4304D8A0386}" label="English (captions)" lang="en-US" r:embed="rId7"/>
                         </p173:trackLst>
                       </p173:tracksInfo>
                     </p:ext>
@@ -6258,10 +6258,10 @@
   </p:clrMapOvr>
   <mc:AlternateContent xmlns:mc="http://schemas.openxmlformats.org/markup-compatibility/2006">
     <mc:Choice xmlns:p14="http://schemas.microsoft.com/office/powerpoint/2010/main" Requires="p14">
-      <p:transition spd="slow" p14:dur="2000" advTm="69040"/>
+      <p:transition spd="slow" p14:dur="2000" advTm="61220"/>
     </mc:Choice>
     <mc:Fallback>
-      <p:transition spd="slow" advTm="69040"/>
+      <p:transition spd="slow" advTm="61220"/>
     </mc:Fallback>
   </mc:AlternateContent>
   <p:timing>
@@ -6295,7 +6295,7 @@
                                   <p:childTnLst>
                                     <p:cmd type="call" cmd="playFrom(0.0)">
                                       <p:cBhvr>
-                                        <p:cTn id="6" dur="68040" fill="hold"/>
+                                        <p:cTn id="6" dur="57216" fill="hold"/>
                                         <p:tgtEl>
                                           <p:spTgt spid="19"/>
                                         </p:tgtEl>
@@ -7164,7 +7164,7 @@
             <a:hlinkClick r:id="" action="ppaction://media"/>
             <a:extLst>
               <a:ext uri="{FF2B5EF4-FFF2-40B4-BE49-F238E27FC236}">
-                <a16:creationId xmlns:a16="http://schemas.microsoft.com/office/drawing/2014/main" id="{0585BA1C-91DB-12E6-1A66-F9AA636281DB}"/>
+                <a16:creationId xmlns:a16="http://schemas.microsoft.com/office/drawing/2014/main" id="{98EB4DDE-8A1B-1D26-33FA-E7364C704382}"/>
               </a:ext>
             </a:extLst>
           </p:cNvPr>
@@ -7180,7 +7180,7 @@
                     <p:ext uri="{3AFAAA56-56D3-431D-BCD4-E75A35582382}">
                       <p173:tracksInfo xmlns:p173="http://schemas.microsoft.com/office/powerpoint/2017/3/main" displayLoc="slide">
                         <p173:trackLst>
-                          <p173:track id="{64F42161-84EF-445C-93BE-E9D9A10B2977}" label="English (captions)" lang="en-US" r:embed="rId9"/>
+                          <p173:track id="{5B543F9B-3882-4F94-99CA-E50EC6532877}" label="English (captions)" lang="en-US" r:embed="rId9"/>
                         </p173:trackLst>
                       </p173:tracksInfo>
                     </p:ext>
@@ -7213,10 +7213,10 @@
   </p:clrMapOvr>
   <mc:AlternateContent xmlns:mc="http://schemas.openxmlformats.org/markup-compatibility/2006">
     <mc:Choice xmlns:p14="http://schemas.microsoft.com/office/powerpoint/2010/main" Requires="p14">
-      <p:transition spd="slow" p14:dur="2000" advTm="58500"/>
+      <p:transition spd="slow" p14:dur="2000" advTm="55340"/>
     </mc:Choice>
     <mc:Fallback>
-      <p:transition spd="slow" advTm="58500"/>
+      <p:transition spd="slow" advTm="55340"/>
     </mc:Fallback>
   </mc:AlternateContent>
   <p:timing>
@@ -7250,7 +7250,7 @@
                                   <p:childTnLst>
                                     <p:cmd type="call" cmd="playFrom(0.0)">
                                       <p:cBhvr>
-                                        <p:cTn id="6" dur="57504" fill="hold"/>
+                                        <p:cTn id="6" dur="51336" fill="hold"/>
                                         <p:tgtEl>
                                           <p:spTgt spid="20"/>
                                         </p:tgtEl>
@@ -8443,7 +8443,7 @@
             <a:hlinkClick r:id="" action="ppaction://media"/>
             <a:extLst>
               <a:ext uri="{FF2B5EF4-FFF2-40B4-BE49-F238E27FC236}">
-                <a16:creationId xmlns:a16="http://schemas.microsoft.com/office/drawing/2014/main" id="{4CEF7CB8-A3D8-A883-9D26-9E87CB90500B}"/>
+                <a16:creationId xmlns:a16="http://schemas.microsoft.com/office/drawing/2014/main" id="{9D7CA80B-1997-6F28-8B5A-756C2728A08C}"/>
               </a:ext>
             </a:extLst>
           </p:cNvPr>
@@ -8459,7 +8459,7 @@
                     <p:ext uri="{3AFAAA56-56D3-431D-BCD4-E75A35582382}">
                       <p173:tracksInfo xmlns:p173="http://schemas.microsoft.com/office/powerpoint/2017/3/main" displayLoc="slide">
                         <p173:trackLst>
-                          <p173:track id="{633FE210-0C48-47DA-B06D-F3C239BFB6BA}" label="English (captions)" lang="en-US" r:embed="rId10"/>
+                          <p173:track id="{9745AA18-59E8-4F80-84A7-733F88CE9E82}" label="English (captions)" lang="en-US" r:embed="rId10"/>
                         </p173:trackLst>
                       </p173:tracksInfo>
                     </p:ext>
@@ -8492,10 +8492,10 @@
   </p:clrMapOvr>
   <mc:AlternateContent xmlns:mc="http://schemas.openxmlformats.org/markup-compatibility/2006">
     <mc:Choice xmlns:p14="http://schemas.microsoft.com/office/powerpoint/2010/main" Requires="p14">
-      <p:transition spd="slow" p14:dur="2000" advTm="64340"/>
+      <p:transition spd="slow" p14:dur="2000" advTm="55500"/>
     </mc:Choice>
     <mc:Fallback>
-      <p:transition spd="slow" advTm="64340"/>
+      <p:transition spd="slow" advTm="55500"/>
     </mc:Fallback>
   </mc:AlternateContent>
   <p:timing>
@@ -8529,7 +8529,7 @@
                                   <p:childTnLst>
                                     <p:cmd type="call" cmd="playFrom(0.0)">
                                       <p:cBhvr>
-                                        <p:cTn id="6" dur="63336" fill="hold"/>
+                                        <p:cTn id="6" dur="51504" fill="hold"/>
                                         <p:tgtEl>
                                           <p:spTgt spid="26"/>
                                         </p:tgtEl>
@@ -9554,7 +9554,7 @@
             <a:hlinkClick r:id="" action="ppaction://media"/>
             <a:extLst>
               <a:ext uri="{FF2B5EF4-FFF2-40B4-BE49-F238E27FC236}">
-                <a16:creationId xmlns:a16="http://schemas.microsoft.com/office/drawing/2014/main" id="{B870F264-3884-6943-B504-00FCB821A5BE}"/>
+                <a16:creationId xmlns:a16="http://schemas.microsoft.com/office/drawing/2014/main" id="{C26ACABF-8727-B50E-83E1-B094427631FB}"/>
               </a:ext>
             </a:extLst>
           </p:cNvPr>
@@ -9570,7 +9570,7 @@
                     <p:ext uri="{3AFAAA56-56D3-431D-BCD4-E75A35582382}">
                       <p173:tracksInfo xmlns:p173="http://schemas.microsoft.com/office/powerpoint/2017/3/main" displayLoc="slide">
                         <p173:trackLst>
-                          <p173:track id="{81C9BAE0-F517-4C4E-B622-FB20CEDB45F3}" label="English (captions)" lang="en-US" r:embed="rId7"/>
+                          <p173:track id="{B1873D23-CE87-45C9-9143-DE0B5A06A899}" label="English (captions)" lang="en-US" r:embed="rId7"/>
                         </p173:trackLst>
                       </p173:tracksInfo>
                     </p:ext>
@@ -9603,10 +9603,10 @@
   </p:clrMapOvr>
   <mc:AlternateContent xmlns:mc="http://schemas.openxmlformats.org/markup-compatibility/2006">
     <mc:Choice xmlns:p14="http://schemas.microsoft.com/office/powerpoint/2010/main" Requires="p14">
-      <p:transition spd="slow" p14:dur="2000" advTm="75210"/>
+      <p:transition spd="slow" p14:dur="2000" advTm="59220"/>
     </mc:Choice>
     <mc:Fallback>
-      <p:transition spd="slow" advTm="75210"/>
+      <p:transition spd="slow" advTm="59220"/>
     </mc:Fallback>
   </mc:AlternateContent>
   <p:timing>
@@ -9640,7 +9640,7 @@
                                   <p:childTnLst>
                                     <p:cmd type="call" cmd="playFrom(0.0)">
                                       <p:cBhvr>
-                                        <p:cTn id="6" dur="74208" fill="hold"/>
+                                        <p:cTn id="6" dur="55224" fill="hold"/>
                                         <p:tgtEl>
                                           <p:spTgt spid="21"/>
                                         </p:tgtEl>
@@ -10693,7 +10693,7 @@
             <a:hlinkClick r:id="" action="ppaction://media"/>
             <a:extLst>
               <a:ext uri="{FF2B5EF4-FFF2-40B4-BE49-F238E27FC236}">
-                <a16:creationId xmlns:a16="http://schemas.microsoft.com/office/drawing/2014/main" id="{89066D06-788F-0671-BFCE-CDEF1A443FD4}"/>
+                <a16:creationId xmlns:a16="http://schemas.microsoft.com/office/drawing/2014/main" id="{2D84342E-5257-D921-7E9F-9F02F449471A}"/>
               </a:ext>
             </a:extLst>
           </p:cNvPr>
@@ -10709,7 +10709,7 @@
                     <p:ext uri="{3AFAAA56-56D3-431D-BCD4-E75A35582382}">
                       <p173:tracksInfo xmlns:p173="http://schemas.microsoft.com/office/powerpoint/2017/3/main" displayLoc="slide">
                         <p173:trackLst>
-                          <p173:track id="{DFCA6D27-9EEB-4237-BE3C-AB18687CE718}" label="English (captions)" lang="en-US" r:embed="rId7"/>
+                          <p173:track id="{0B21D48B-CC18-441B-A56A-D7563C6E9411}" label="English (captions)" lang="en-US" r:embed="rId7"/>
                         </p173:trackLst>
                       </p173:tracksInfo>
                     </p:ext>
@@ -10742,10 +10742,10 @@
   </p:clrMapOvr>
   <mc:AlternateContent xmlns:mc="http://schemas.openxmlformats.org/markup-compatibility/2006">
     <mc:Choice xmlns:p14="http://schemas.microsoft.com/office/powerpoint/2010/main" Requires="p14">
-      <p:transition spd="slow" p14:dur="2000" advTm="74750"/>
+      <p:transition spd="slow" p14:dur="2000" advTm="55460"/>
     </mc:Choice>
     <mc:Fallback>
-      <p:transition spd="slow" advTm="74750"/>
+      <p:transition spd="slow" advTm="55460"/>
     </mc:Fallback>
   </mc:AlternateContent>
   <p:timing>
@@ -10779,7 +10779,7 @@
                                   <p:childTnLst>
                                     <p:cmd type="call" cmd="playFrom(0.0)">
                                       <p:cBhvr>
-                                        <p:cTn id="6" dur="73752" fill="hold"/>
+                                        <p:cTn id="6" dur="51456" fill="hold"/>
                                         <p:tgtEl>
                                           <p:spTgt spid="23"/>
                                         </p:tgtEl>
@@ -11864,7 +11864,7 @@
             <a:hlinkClick r:id="" action="ppaction://media"/>
             <a:extLst>
               <a:ext uri="{FF2B5EF4-FFF2-40B4-BE49-F238E27FC236}">
-                <a16:creationId xmlns:a16="http://schemas.microsoft.com/office/drawing/2014/main" id="{782B598D-A4F6-0D2C-782B-FB3EA4B65DEE}"/>
+                <a16:creationId xmlns:a16="http://schemas.microsoft.com/office/drawing/2014/main" id="{6CC836D2-310B-796D-1095-D9C4D0478229}"/>
               </a:ext>
             </a:extLst>
           </p:cNvPr>
@@ -11880,7 +11880,7 @@
                     <p:ext uri="{3AFAAA56-56D3-431D-BCD4-E75A35582382}">
                       <p173:tracksInfo xmlns:p173="http://schemas.microsoft.com/office/powerpoint/2017/3/main" displayLoc="slide">
                         <p173:trackLst>
-                          <p173:track id="{C89B0800-5DBE-4DF1-8C4B-3313F7B51516}" label="English (captions)" lang="en-US" r:embed="rId10"/>
+                          <p173:track id="{D95B36E0-0E1F-4D87-A283-A324D2FC20C5}" label="English (captions)" lang="en-US" r:embed="rId10"/>
                         </p173:trackLst>
                       </p173:tracksInfo>
                     </p:ext>
@@ -11913,10 +11913,10 @@
   </p:clrMapOvr>
   <mc:AlternateContent xmlns:mc="http://schemas.openxmlformats.org/markup-compatibility/2006">
     <mc:Choice xmlns:p14="http://schemas.microsoft.com/office/powerpoint/2010/main" Requires="p14">
-      <p:transition spd="slow" p14:dur="2000" advTm="69090"/>
+      <p:transition spd="slow" p14:dur="2000" advTm="53320"/>
     </mc:Choice>
     <mc:Fallback>
-      <p:transition spd="slow" advTm="69090"/>
+      <p:transition spd="slow" advTm="53320"/>
     </mc:Fallback>
   </mc:AlternateContent>
   <p:timing>
@@ -11950,7 +11950,7 @@
                                   <p:childTnLst>
                                     <p:cmd type="call" cmd="playFrom(0.0)">
                                       <p:cBhvr>
-                                        <p:cTn id="6" dur="68088" fill="hold"/>
+                                        <p:cTn id="6" dur="49320" fill="hold"/>
                                         <p:tgtEl>
                                           <p:spTgt spid="26"/>
                                         </p:tgtEl>

--- a/presentations/b04-access/B04_Access_Narrated.pptx
+++ b/presentations/b04-access/B04_Access_Narrated.pptx
@@ -179,7 +179,7 @@
     </p:spTree>
     <p:extLst>
       <p:ext uri="{BB962C8B-B14F-4D97-AF65-F5344CB8AC3E}">
-        <p14:creationId xmlns:p14="http://schemas.microsoft.com/office/powerpoint/2010/main" val="1987151859"/>
+        <p14:creationId xmlns:p14="http://schemas.microsoft.com/office/powerpoint/2010/main" val="147372342"/>
       </p:ext>
     </p:extLst>
   </p:cSld>
@@ -2160,7 +2160,7 @@
             <a:hlinkClick r:id="" action="ppaction://media"/>
             <a:extLst>
               <a:ext uri="{FF2B5EF4-FFF2-40B4-BE49-F238E27FC236}">
-                <a16:creationId xmlns:a16="http://schemas.microsoft.com/office/drawing/2014/main" id="{1D21B2F9-B41F-E626-0C93-832A76D07B35}"/>
+                <a16:creationId xmlns:a16="http://schemas.microsoft.com/office/drawing/2014/main" id="{CB55DC4A-2A48-BB3C-4C02-63854F7BDCB1}"/>
               </a:ext>
             </a:extLst>
           </p:cNvPr>
@@ -2176,7 +2176,7 @@
                     <p:ext uri="{3AFAAA56-56D3-431D-BCD4-E75A35582382}">
                       <p173:tracksInfo xmlns:p173="http://schemas.microsoft.com/office/powerpoint/2017/3/main" displayLoc="slide">
                         <p173:trackLst>
-                          <p173:track id="{81C9EB63-A181-44F5-86B5-6BAACCC3D160}" label="English (captions)" lang="en-US" r:embed="rId6"/>
+                          <p173:track id="{24196ECA-E995-4EA2-975D-0FAA9E1EE27E}" label="English (captions)" lang="en-US" r:embed="rId6"/>
                         </p173:trackLst>
                       </p173:tracksInfo>
                     </p:ext>
@@ -2194,7 +2194,7 @@
         </p:blipFill>
         <p:spPr>
           <a:xfrm>
-            <a:off x="127000" y="6350000"/>
+            <a:off x="12446000" y="127000"/>
             <a:ext cx="304800" cy="304800"/>
           </a:xfrm>
           <a:prstGeom prst="rect">
@@ -3227,7 +3227,7 @@
             <a:hlinkClick r:id="" action="ppaction://media"/>
             <a:extLst>
               <a:ext uri="{FF2B5EF4-FFF2-40B4-BE49-F238E27FC236}">
-                <a16:creationId xmlns:a16="http://schemas.microsoft.com/office/drawing/2014/main" id="{2986E9DD-12D4-1ACD-89D3-399786A00B4F}"/>
+                <a16:creationId xmlns:a16="http://schemas.microsoft.com/office/drawing/2014/main" id="{34ED4210-28CF-B46B-88E0-0457A7A01421}"/>
               </a:ext>
             </a:extLst>
           </p:cNvPr>
@@ -3243,7 +3243,7 @@
                     <p:ext uri="{3AFAAA56-56D3-431D-BCD4-E75A35582382}">
                       <p173:tracksInfo xmlns:p173="http://schemas.microsoft.com/office/powerpoint/2017/3/main" displayLoc="slide">
                         <p173:trackLst>
-                          <p173:track id="{6CA7A81F-E9FA-45F6-B871-3B4975110D42}" label="English (captions)" lang="en-US" r:embed="rId11"/>
+                          <p173:track id="{3FF455F5-ACE9-49B4-BE77-C676D09D92A7}" label="English (captions)" lang="en-US" r:embed="rId11"/>
                         </p173:trackLst>
                       </p173:tracksInfo>
                     </p:ext>
@@ -3261,7 +3261,7 @@
         </p:blipFill>
         <p:spPr>
           <a:xfrm>
-            <a:off x="127000" y="6350000"/>
+            <a:off x="12446000" y="127000"/>
             <a:ext cx="304800" cy="304800"/>
           </a:xfrm>
           <a:prstGeom prst="rect">
@@ -4277,7 +4277,7 @@
             <a:hlinkClick r:id="" action="ppaction://media"/>
             <a:extLst>
               <a:ext uri="{FF2B5EF4-FFF2-40B4-BE49-F238E27FC236}">
-                <a16:creationId xmlns:a16="http://schemas.microsoft.com/office/drawing/2014/main" id="{BD3B5C13-E4C1-922B-7808-4160B36B3E30}"/>
+                <a16:creationId xmlns:a16="http://schemas.microsoft.com/office/drawing/2014/main" id="{47DDFD2A-45F6-5136-9AB8-097BCA213F77}"/>
               </a:ext>
             </a:extLst>
           </p:cNvPr>
@@ -4293,7 +4293,7 @@
                     <p:ext uri="{3AFAAA56-56D3-431D-BCD4-E75A35582382}">
                       <p173:tracksInfo xmlns:p173="http://schemas.microsoft.com/office/powerpoint/2017/3/main" displayLoc="slide">
                         <p173:trackLst>
-                          <p173:track id="{46082A97-E9C1-4EFB-8E89-1D1DDD0D6A9B}" label="English (captions)" lang="en-US" r:embed="rId11"/>
+                          <p173:track id="{4AC3FAAB-67CE-46B8-81B3-2FBA344D8CF1}" label="English (captions)" lang="en-US" r:embed="rId11"/>
                         </p173:trackLst>
                       </p173:tracksInfo>
                     </p:ext>
@@ -4311,7 +4311,7 @@
         </p:blipFill>
         <p:spPr>
           <a:xfrm>
-            <a:off x="127000" y="6350000"/>
+            <a:off x="12446000" y="127000"/>
             <a:ext cx="304800" cy="304800"/>
           </a:xfrm>
           <a:prstGeom prst="rect">
@@ -5250,7 +5250,7 @@
             <a:hlinkClick r:id="" action="ppaction://media"/>
             <a:extLst>
               <a:ext uri="{FF2B5EF4-FFF2-40B4-BE49-F238E27FC236}">
-                <a16:creationId xmlns:a16="http://schemas.microsoft.com/office/drawing/2014/main" id="{54BA6603-E10F-C7DF-D9CC-68C1BF652ECD}"/>
+                <a16:creationId xmlns:a16="http://schemas.microsoft.com/office/drawing/2014/main" id="{324ED5BF-DFF0-7A5B-D048-E7BF90DF68FE}"/>
               </a:ext>
             </a:extLst>
           </p:cNvPr>
@@ -5266,7 +5266,7 @@
                     <p:ext uri="{3AFAAA56-56D3-431D-BCD4-E75A35582382}">
                       <p173:tracksInfo xmlns:p173="http://schemas.microsoft.com/office/powerpoint/2017/3/main" displayLoc="slide">
                         <p173:trackLst>
-                          <p173:track id="{AFC008EC-4542-453D-8D26-7FFA918960B9}" label="English (captions)" lang="en-US" r:embed="rId8"/>
+                          <p173:track id="{158EEA18-95A9-434B-93AB-754476DAA453}" label="English (captions)" lang="en-US" r:embed="rId8"/>
                         </p173:trackLst>
                       </p173:tracksInfo>
                     </p:ext>
@@ -5284,7 +5284,7 @@
         </p:blipFill>
         <p:spPr>
           <a:xfrm>
-            <a:off x="127000" y="6350000"/>
+            <a:off x="12446000" y="127000"/>
             <a:ext cx="304800" cy="304800"/>
           </a:xfrm>
           <a:prstGeom prst="rect">
@@ -6209,7 +6209,7 @@
             <a:hlinkClick r:id="" action="ppaction://media"/>
             <a:extLst>
               <a:ext uri="{FF2B5EF4-FFF2-40B4-BE49-F238E27FC236}">
-                <a16:creationId xmlns:a16="http://schemas.microsoft.com/office/drawing/2014/main" id="{09613D6D-EA6B-506C-6F83-123716A91629}"/>
+                <a16:creationId xmlns:a16="http://schemas.microsoft.com/office/drawing/2014/main" id="{CB826007-E16D-B2B9-94E5-1AC18CD8FDC1}"/>
               </a:ext>
             </a:extLst>
           </p:cNvPr>
@@ -6225,7 +6225,7 @@
                     <p:ext uri="{3AFAAA56-56D3-431D-BCD4-E75A35582382}">
                       <p173:tracksInfo xmlns:p173="http://schemas.microsoft.com/office/powerpoint/2017/3/main" displayLoc="slide">
                         <p173:trackLst>
-                          <p173:track id="{F095CD80-801C-4F05-A0A3-E4304D8A0386}" label="English (captions)" lang="en-US" r:embed="rId7"/>
+                          <p173:track id="{AA6604D3-1A12-41F8-8154-4586A9FC44B4}" label="English (captions)" lang="en-US" r:embed="rId7"/>
                         </p173:trackLst>
                       </p173:tracksInfo>
                     </p:ext>
@@ -6243,7 +6243,7 @@
         </p:blipFill>
         <p:spPr>
           <a:xfrm>
-            <a:off x="127000" y="6350000"/>
+            <a:off x="12446000" y="127000"/>
             <a:ext cx="304800" cy="304800"/>
           </a:xfrm>
           <a:prstGeom prst="rect">
@@ -7164,7 +7164,7 @@
             <a:hlinkClick r:id="" action="ppaction://media"/>
             <a:extLst>
               <a:ext uri="{FF2B5EF4-FFF2-40B4-BE49-F238E27FC236}">
-                <a16:creationId xmlns:a16="http://schemas.microsoft.com/office/drawing/2014/main" id="{98EB4DDE-8A1B-1D26-33FA-E7364C704382}"/>
+                <a16:creationId xmlns:a16="http://schemas.microsoft.com/office/drawing/2014/main" id="{DB401A29-2266-FB05-BB4E-BB85026BFB73}"/>
               </a:ext>
             </a:extLst>
           </p:cNvPr>
@@ -7180,7 +7180,7 @@
                     <p:ext uri="{3AFAAA56-56D3-431D-BCD4-E75A35582382}">
                       <p173:tracksInfo xmlns:p173="http://schemas.microsoft.com/office/powerpoint/2017/3/main" displayLoc="slide">
                         <p173:trackLst>
-                          <p173:track id="{5B543F9B-3882-4F94-99CA-E50EC6532877}" label="English (captions)" lang="en-US" r:embed="rId9"/>
+                          <p173:track id="{AD5F20FB-6D6F-4411-960B-3963B8875831}" label="English (captions)" lang="en-US" r:embed="rId9"/>
                         </p173:trackLst>
                       </p173:tracksInfo>
                     </p:ext>
@@ -7198,7 +7198,7 @@
         </p:blipFill>
         <p:spPr>
           <a:xfrm>
-            <a:off x="127000" y="6350000"/>
+            <a:off x="12446000" y="127000"/>
             <a:ext cx="304800" cy="304800"/>
           </a:xfrm>
           <a:prstGeom prst="rect">
@@ -8443,7 +8443,7 @@
             <a:hlinkClick r:id="" action="ppaction://media"/>
             <a:extLst>
               <a:ext uri="{FF2B5EF4-FFF2-40B4-BE49-F238E27FC236}">
-                <a16:creationId xmlns:a16="http://schemas.microsoft.com/office/drawing/2014/main" id="{9D7CA80B-1997-6F28-8B5A-756C2728A08C}"/>
+                <a16:creationId xmlns:a16="http://schemas.microsoft.com/office/drawing/2014/main" id="{D6AEF65A-FC9A-0ABF-7DFF-F7965F6EEC98}"/>
               </a:ext>
             </a:extLst>
           </p:cNvPr>
@@ -8459,7 +8459,7 @@
                     <p:ext uri="{3AFAAA56-56D3-431D-BCD4-E75A35582382}">
                       <p173:tracksInfo xmlns:p173="http://schemas.microsoft.com/office/powerpoint/2017/3/main" displayLoc="slide">
                         <p173:trackLst>
-                          <p173:track id="{9745AA18-59E8-4F80-84A7-733F88CE9E82}" label="English (captions)" lang="en-US" r:embed="rId10"/>
+                          <p173:track id="{81B2ED5D-1644-447F-B8B6-1D64838297AC}" label="English (captions)" lang="en-US" r:embed="rId10"/>
                         </p173:trackLst>
                       </p173:tracksInfo>
                     </p:ext>
@@ -8477,7 +8477,7 @@
         </p:blipFill>
         <p:spPr>
           <a:xfrm>
-            <a:off x="127000" y="6350000"/>
+            <a:off x="12446000" y="127000"/>
             <a:ext cx="304800" cy="304800"/>
           </a:xfrm>
           <a:prstGeom prst="rect">
@@ -9554,7 +9554,7 @@
             <a:hlinkClick r:id="" action="ppaction://media"/>
             <a:extLst>
               <a:ext uri="{FF2B5EF4-FFF2-40B4-BE49-F238E27FC236}">
-                <a16:creationId xmlns:a16="http://schemas.microsoft.com/office/drawing/2014/main" id="{C26ACABF-8727-B50E-83E1-B094427631FB}"/>
+                <a16:creationId xmlns:a16="http://schemas.microsoft.com/office/drawing/2014/main" id="{E452B888-BBFE-0CB8-787A-4329E07658AA}"/>
               </a:ext>
             </a:extLst>
           </p:cNvPr>
@@ -9570,7 +9570,7 @@
                     <p:ext uri="{3AFAAA56-56D3-431D-BCD4-E75A35582382}">
                       <p173:tracksInfo xmlns:p173="http://schemas.microsoft.com/office/powerpoint/2017/3/main" displayLoc="slide">
                         <p173:trackLst>
-                          <p173:track id="{B1873D23-CE87-45C9-9143-DE0B5A06A899}" label="English (captions)" lang="en-US" r:embed="rId7"/>
+                          <p173:track id="{29DC328C-9027-41EC-8FE8-DEA58DC9A0F6}" label="English (captions)" lang="en-US" r:embed="rId7"/>
                         </p173:trackLst>
                       </p173:tracksInfo>
                     </p:ext>
@@ -9588,7 +9588,7 @@
         </p:blipFill>
         <p:spPr>
           <a:xfrm>
-            <a:off x="127000" y="6350000"/>
+            <a:off x="12446000" y="127000"/>
             <a:ext cx="304800" cy="304800"/>
           </a:xfrm>
           <a:prstGeom prst="rect">
@@ -10693,7 +10693,7 @@
             <a:hlinkClick r:id="" action="ppaction://media"/>
             <a:extLst>
               <a:ext uri="{FF2B5EF4-FFF2-40B4-BE49-F238E27FC236}">
-                <a16:creationId xmlns:a16="http://schemas.microsoft.com/office/drawing/2014/main" id="{2D84342E-5257-D921-7E9F-9F02F449471A}"/>
+                <a16:creationId xmlns:a16="http://schemas.microsoft.com/office/drawing/2014/main" id="{98AC864C-19B3-AF8C-095D-ABFAA522EC80}"/>
               </a:ext>
             </a:extLst>
           </p:cNvPr>
@@ -10709,7 +10709,7 @@
                     <p:ext uri="{3AFAAA56-56D3-431D-BCD4-E75A35582382}">
                       <p173:tracksInfo xmlns:p173="http://schemas.microsoft.com/office/powerpoint/2017/3/main" displayLoc="slide">
                         <p173:trackLst>
-                          <p173:track id="{0B21D48B-CC18-441B-A56A-D7563C6E9411}" label="English (captions)" lang="en-US" r:embed="rId7"/>
+                          <p173:track id="{F8A8D05A-76FD-41A9-9811-FA74EEDD3106}" label="English (captions)" lang="en-US" r:embed="rId7"/>
                         </p173:trackLst>
                       </p173:tracksInfo>
                     </p:ext>
@@ -10727,7 +10727,7 @@
         </p:blipFill>
         <p:spPr>
           <a:xfrm>
-            <a:off x="127000" y="6350000"/>
+            <a:off x="12446000" y="127000"/>
             <a:ext cx="304800" cy="304800"/>
           </a:xfrm>
           <a:prstGeom prst="rect">
@@ -11864,7 +11864,7 @@
             <a:hlinkClick r:id="" action="ppaction://media"/>
             <a:extLst>
               <a:ext uri="{FF2B5EF4-FFF2-40B4-BE49-F238E27FC236}">
-                <a16:creationId xmlns:a16="http://schemas.microsoft.com/office/drawing/2014/main" id="{6CC836D2-310B-796D-1095-D9C4D0478229}"/>
+                <a16:creationId xmlns:a16="http://schemas.microsoft.com/office/drawing/2014/main" id="{DF0935D6-ADA0-4B03-95BC-601A70062B58}"/>
               </a:ext>
             </a:extLst>
           </p:cNvPr>
@@ -11880,7 +11880,7 @@
                     <p:ext uri="{3AFAAA56-56D3-431D-BCD4-E75A35582382}">
                       <p173:tracksInfo xmlns:p173="http://schemas.microsoft.com/office/powerpoint/2017/3/main" displayLoc="slide">
                         <p173:trackLst>
-                          <p173:track id="{D95B36E0-0E1F-4D87-A283-A324D2FC20C5}" label="English (captions)" lang="en-US" r:embed="rId10"/>
+                          <p173:track id="{838970A5-598B-47AB-8866-4250E285C33A}" label="English (captions)" lang="en-US" r:embed="rId10"/>
                         </p173:trackLst>
                       </p173:tracksInfo>
                     </p:ext>
@@ -11898,7 +11898,7 @@
         </p:blipFill>
         <p:spPr>
           <a:xfrm>
-            <a:off x="127000" y="6350000"/>
+            <a:off x="12446000" y="127000"/>
             <a:ext cx="304800" cy="304800"/>
           </a:xfrm>
           <a:prstGeom prst="rect">
